--- a/reports/SLIDE_CHUYEN_DE_6.pptx
+++ b/reports/SLIDE_CHUYEN_DE_6.pptx
@@ -5,20 +5,20 @@
     <p:sldMasterId id="2147483648" r:id="rId1"/>
   </p:sldMasterIdLst>
   <p:sldIdLst>
-    <p:sldId id="256" r:id="rId7"/>
-    <p:sldId id="257" r:id="rId8"/>
-    <p:sldId id="258" r:id="rId9"/>
-    <p:sldId id="259" r:id="rId10"/>
-    <p:sldId id="260" r:id="rId11"/>
-    <p:sldId id="261" r:id="rId12"/>
-    <p:sldId id="262" r:id="rId13"/>
-    <p:sldId id="263" r:id="rId14"/>
-    <p:sldId id="264" r:id="rId15"/>
-    <p:sldId id="265" r:id="rId16"/>
-    <p:sldId id="266" r:id="rId17"/>
-    <p:sldId id="267" r:id="rId18"/>
+    <p:sldId id="256" r:id="rId2"/>
+    <p:sldId id="257" r:id="rId3"/>
+    <p:sldId id="258" r:id="rId4"/>
+    <p:sldId id="259" r:id="rId5"/>
+    <p:sldId id="260" r:id="rId6"/>
+    <p:sldId id="261" r:id="rId7"/>
+    <p:sldId id="262" r:id="rId8"/>
+    <p:sldId id="263" r:id="rId9"/>
+    <p:sldId id="264" r:id="rId10"/>
+    <p:sldId id="265" r:id="rId11"/>
+    <p:sldId id="266" r:id="rId12"/>
+    <p:sldId id="267" r:id="rId13"/>
   </p:sldIdLst>
-  <p:sldSz cx="12191695" cy="6858000" type="screen4x3"/>
+  <p:sldSz cx="12192000" cy="6858000"/>
   <p:notesSz cx="6858000" cy="9144000"/>
   <p:defaultTextStyle>
     <a:defPPr>
@@ -115,6 +115,22 @@
       </a:defRPr>
     </a:lvl9pPr>
   </p:defaultTextStyle>
+  <p:extLst>
+    <p:ext uri="{EFAFB233-063F-42B5-8137-9DF3F51BA10A}">
+      <p15:sldGuideLst xmlns:p15="http://schemas.microsoft.com/office/powerpoint/2012/main">
+        <p15:guide id="1" orient="horz" pos="2160">
+          <p15:clr>
+            <a:srgbClr val="A4A3A4"/>
+          </p15:clr>
+        </p15:guide>
+        <p15:guide id="2" pos="2880">
+          <p15:clr>
+            <a:srgbClr val="A4A3A4"/>
+          </p15:clr>
+        </p15:guide>
+      </p15:sldGuideLst>
+    </p:ext>
+  </p:extLst>
 </p:presentation>
 </file>
 
@@ -156,10 +172,9 @@
           <a:lstStyle/>
           <a:p>
             <a:r>
-              <a:rPr lang="en-US" smtClean="0"/>
+              <a:rPr lang="en-US"/>
               <a:t>Click to edit Master title style</a:t>
             </a:r>
-            <a:endParaRPr lang="en-US"/>
           </a:p>
         </p:txBody>
       </p:sp>
@@ -275,10 +290,9 @@
           </a:lstStyle>
           <a:p>
             <a:r>
-              <a:rPr lang="en-US" smtClean="0"/>
+              <a:rPr lang="en-US"/>
               <a:t>Click to edit Master subtitle style</a:t>
             </a:r>
-            <a:endParaRPr lang="en-US"/>
           </a:p>
         </p:txBody>
       </p:sp>
@@ -299,7 +313,7 @@
           <a:p>
             <a:fld id="{5BCAD085-E8A6-8845-BD4E-CB4CCA059FC4}" type="datetimeFigureOut">
               <a:rPr lang="en-US" smtClean="0"/>
-              <a:t>1/27/13</a:t>
+              <a:t>8/13/2026</a:t>
             </a:fld>
             <a:endParaRPr lang="en-US"/>
           </a:p>
@@ -393,10 +407,9 @@
           <a:lstStyle/>
           <a:p>
             <a:r>
-              <a:rPr lang="en-US" smtClean="0"/>
+              <a:rPr lang="en-US"/>
               <a:t>Click to edit Master title style</a:t>
             </a:r>
-            <a:endParaRPr lang="en-US"/>
           </a:p>
         </p:txBody>
       </p:sp>
@@ -417,38 +430,37 @@
           <a:p>
             <a:pPr lvl="0"/>
             <a:r>
-              <a:rPr lang="en-US" smtClean="0"/>
+              <a:rPr lang="en-US"/>
               <a:t>Click to edit Master text styles</a:t>
             </a:r>
           </a:p>
           <a:p>
             <a:pPr lvl="1"/>
             <a:r>
-              <a:rPr lang="en-US" smtClean="0"/>
+              <a:rPr lang="en-US"/>
               <a:t>Second level</a:t>
             </a:r>
           </a:p>
           <a:p>
             <a:pPr lvl="2"/>
             <a:r>
-              <a:rPr lang="en-US" smtClean="0"/>
+              <a:rPr lang="en-US"/>
               <a:t>Third level</a:t>
             </a:r>
           </a:p>
           <a:p>
             <a:pPr lvl="3"/>
             <a:r>
-              <a:rPr lang="en-US" smtClean="0"/>
+              <a:rPr lang="en-US"/>
               <a:t>Fourth level</a:t>
             </a:r>
           </a:p>
           <a:p>
             <a:pPr lvl="4"/>
             <a:r>
-              <a:rPr lang="en-US" smtClean="0"/>
+              <a:rPr lang="en-US"/>
               <a:t>Fifth level</a:t>
             </a:r>
-            <a:endParaRPr lang="en-US"/>
           </a:p>
         </p:txBody>
       </p:sp>
@@ -469,7 +481,7 @@
           <a:p>
             <a:fld id="{5BCAD085-E8A6-8845-BD4E-CB4CCA059FC4}" type="datetimeFigureOut">
               <a:rPr lang="en-US" smtClean="0"/>
-              <a:t>1/27/13</a:t>
+              <a:t>8/13/2026</a:t>
             </a:fld>
             <a:endParaRPr lang="en-US"/>
           </a:p>
@@ -568,10 +580,9 @@
           <a:lstStyle/>
           <a:p>
             <a:r>
-              <a:rPr lang="en-US" smtClean="0"/>
+              <a:rPr lang="en-US"/>
               <a:t>Click to edit Master title style</a:t>
             </a:r>
-            <a:endParaRPr lang="en-US"/>
           </a:p>
         </p:txBody>
       </p:sp>
@@ -597,38 +608,37 @@
           <a:p>
             <a:pPr lvl="0"/>
             <a:r>
-              <a:rPr lang="en-US" smtClean="0"/>
+              <a:rPr lang="en-US"/>
               <a:t>Click to edit Master text styles</a:t>
             </a:r>
           </a:p>
           <a:p>
             <a:pPr lvl="1"/>
             <a:r>
-              <a:rPr lang="en-US" smtClean="0"/>
+              <a:rPr lang="en-US"/>
               <a:t>Second level</a:t>
             </a:r>
           </a:p>
           <a:p>
             <a:pPr lvl="2"/>
             <a:r>
-              <a:rPr lang="en-US" smtClean="0"/>
+              <a:rPr lang="en-US"/>
               <a:t>Third level</a:t>
             </a:r>
           </a:p>
           <a:p>
             <a:pPr lvl="3"/>
             <a:r>
-              <a:rPr lang="en-US" smtClean="0"/>
+              <a:rPr lang="en-US"/>
               <a:t>Fourth level</a:t>
             </a:r>
           </a:p>
           <a:p>
             <a:pPr lvl="4"/>
             <a:r>
-              <a:rPr lang="en-US" smtClean="0"/>
+              <a:rPr lang="en-US"/>
               <a:t>Fifth level</a:t>
             </a:r>
-            <a:endParaRPr lang="en-US"/>
           </a:p>
         </p:txBody>
       </p:sp>
@@ -649,7 +659,7 @@
           <a:p>
             <a:fld id="{5BCAD085-E8A6-8845-BD4E-CB4CCA059FC4}" type="datetimeFigureOut">
               <a:rPr lang="en-US" smtClean="0"/>
-              <a:t>1/27/13</a:t>
+              <a:t>8/13/2026</a:t>
             </a:fld>
             <a:endParaRPr lang="en-US"/>
           </a:p>
@@ -743,10 +753,9 @@
           <a:lstStyle/>
           <a:p>
             <a:r>
-              <a:rPr lang="en-US" smtClean="0"/>
+              <a:rPr lang="en-US"/>
               <a:t>Click to edit Master title style</a:t>
             </a:r>
-            <a:endParaRPr lang="en-US"/>
           </a:p>
         </p:txBody>
       </p:sp>
@@ -767,38 +776,37 @@
           <a:p>
             <a:pPr lvl="0"/>
             <a:r>
-              <a:rPr lang="en-US" smtClean="0"/>
+              <a:rPr lang="en-US"/>
               <a:t>Click to edit Master text styles</a:t>
             </a:r>
           </a:p>
           <a:p>
             <a:pPr lvl="1"/>
             <a:r>
-              <a:rPr lang="en-US" smtClean="0"/>
+              <a:rPr lang="en-US"/>
               <a:t>Second level</a:t>
             </a:r>
           </a:p>
           <a:p>
             <a:pPr lvl="2"/>
             <a:r>
-              <a:rPr lang="en-US" smtClean="0"/>
+              <a:rPr lang="en-US"/>
               <a:t>Third level</a:t>
             </a:r>
           </a:p>
           <a:p>
             <a:pPr lvl="3"/>
             <a:r>
-              <a:rPr lang="en-US" smtClean="0"/>
+              <a:rPr lang="en-US"/>
               <a:t>Fourth level</a:t>
             </a:r>
           </a:p>
           <a:p>
             <a:pPr lvl="4"/>
             <a:r>
-              <a:rPr lang="en-US" smtClean="0"/>
+              <a:rPr lang="en-US"/>
               <a:t>Fifth level</a:t>
             </a:r>
-            <a:endParaRPr lang="en-US"/>
           </a:p>
         </p:txBody>
       </p:sp>
@@ -819,7 +827,7 @@
           <a:p>
             <a:fld id="{5BCAD085-E8A6-8845-BD4E-CB4CCA059FC4}" type="datetimeFigureOut">
               <a:rPr lang="en-US" smtClean="0"/>
-              <a:t>1/27/13</a:t>
+              <a:t>8/13/2026</a:t>
             </a:fld>
             <a:endParaRPr lang="en-US"/>
           </a:p>
@@ -922,10 +930,9 @@
           </a:lstStyle>
           <a:p>
             <a:r>
-              <a:rPr lang="en-US" smtClean="0"/>
+              <a:rPr lang="en-US"/>
               <a:t>Click to edit Master title style</a:t>
             </a:r>
-            <a:endParaRPr lang="en-US"/>
           </a:p>
         </p:txBody>
       </p:sp>
@@ -1042,7 +1049,7 @@
           <a:p>
             <a:pPr lvl="0"/>
             <a:r>
-              <a:rPr lang="en-US" smtClean="0"/>
+              <a:rPr lang="en-US"/>
               <a:t>Click to edit Master text styles</a:t>
             </a:r>
           </a:p>
@@ -1065,7 +1072,7 @@
           <a:p>
             <a:fld id="{5BCAD085-E8A6-8845-BD4E-CB4CCA059FC4}" type="datetimeFigureOut">
               <a:rPr lang="en-US" smtClean="0"/>
-              <a:t>1/27/13</a:t>
+              <a:t>8/13/2026</a:t>
             </a:fld>
             <a:endParaRPr lang="en-US"/>
           </a:p>
@@ -1159,10 +1166,9 @@
           <a:lstStyle/>
           <a:p>
             <a:r>
-              <a:rPr lang="en-US" smtClean="0"/>
+              <a:rPr lang="en-US"/>
               <a:t>Click to edit Master title style</a:t>
             </a:r>
-            <a:endParaRPr lang="en-US"/>
           </a:p>
         </p:txBody>
       </p:sp>
@@ -1216,38 +1222,37 @@
           <a:p>
             <a:pPr lvl="0"/>
             <a:r>
-              <a:rPr lang="en-US" smtClean="0"/>
+              <a:rPr lang="en-US"/>
               <a:t>Click to edit Master text styles</a:t>
             </a:r>
           </a:p>
           <a:p>
             <a:pPr lvl="1"/>
             <a:r>
-              <a:rPr lang="en-US" smtClean="0"/>
+              <a:rPr lang="en-US"/>
               <a:t>Second level</a:t>
             </a:r>
           </a:p>
           <a:p>
             <a:pPr lvl="2"/>
             <a:r>
-              <a:rPr lang="en-US" smtClean="0"/>
+              <a:rPr lang="en-US"/>
               <a:t>Third level</a:t>
             </a:r>
           </a:p>
           <a:p>
             <a:pPr lvl="3"/>
             <a:r>
-              <a:rPr lang="en-US" smtClean="0"/>
+              <a:rPr lang="en-US"/>
               <a:t>Fourth level</a:t>
             </a:r>
           </a:p>
           <a:p>
             <a:pPr lvl="4"/>
             <a:r>
-              <a:rPr lang="en-US" smtClean="0"/>
+              <a:rPr lang="en-US"/>
               <a:t>Fifth level</a:t>
             </a:r>
-            <a:endParaRPr lang="en-US"/>
           </a:p>
         </p:txBody>
       </p:sp>
@@ -1301,38 +1306,37 @@
           <a:p>
             <a:pPr lvl="0"/>
             <a:r>
-              <a:rPr lang="en-US" smtClean="0"/>
+              <a:rPr lang="en-US"/>
               <a:t>Click to edit Master text styles</a:t>
             </a:r>
           </a:p>
           <a:p>
             <a:pPr lvl="1"/>
             <a:r>
-              <a:rPr lang="en-US" smtClean="0"/>
+              <a:rPr lang="en-US"/>
               <a:t>Second level</a:t>
             </a:r>
           </a:p>
           <a:p>
             <a:pPr lvl="2"/>
             <a:r>
-              <a:rPr lang="en-US" smtClean="0"/>
+              <a:rPr lang="en-US"/>
               <a:t>Third level</a:t>
             </a:r>
           </a:p>
           <a:p>
             <a:pPr lvl="3"/>
             <a:r>
-              <a:rPr lang="en-US" smtClean="0"/>
+              <a:rPr lang="en-US"/>
               <a:t>Fourth level</a:t>
             </a:r>
           </a:p>
           <a:p>
             <a:pPr lvl="4"/>
             <a:r>
-              <a:rPr lang="en-US" smtClean="0"/>
+              <a:rPr lang="en-US"/>
               <a:t>Fifth level</a:t>
             </a:r>
-            <a:endParaRPr lang="en-US"/>
           </a:p>
         </p:txBody>
       </p:sp>
@@ -1353,7 +1357,7 @@
           <a:p>
             <a:fld id="{5BCAD085-E8A6-8845-BD4E-CB4CCA059FC4}" type="datetimeFigureOut">
               <a:rPr lang="en-US" smtClean="0"/>
-              <a:t>1/27/13</a:t>
+              <a:t>8/13/2026</a:t>
             </a:fld>
             <a:endParaRPr lang="en-US"/>
           </a:p>
@@ -1451,10 +1455,9 @@
           </a:lstStyle>
           <a:p>
             <a:r>
-              <a:rPr lang="en-US" smtClean="0"/>
+              <a:rPr lang="en-US"/>
               <a:t>Click to edit Master title style</a:t>
             </a:r>
-            <a:endParaRPr lang="en-US"/>
           </a:p>
         </p:txBody>
       </p:sp>
@@ -1517,7 +1520,7 @@
           <a:p>
             <a:pPr lvl="0"/>
             <a:r>
-              <a:rPr lang="en-US" smtClean="0"/>
+              <a:rPr lang="en-US"/>
               <a:t>Click to edit Master text styles</a:t>
             </a:r>
           </a:p>
@@ -1573,38 +1576,37 @@
           <a:p>
             <a:pPr lvl="0"/>
             <a:r>
-              <a:rPr lang="en-US" smtClean="0"/>
+              <a:rPr lang="en-US"/>
               <a:t>Click to edit Master text styles</a:t>
             </a:r>
           </a:p>
           <a:p>
             <a:pPr lvl="1"/>
             <a:r>
-              <a:rPr lang="en-US" smtClean="0"/>
+              <a:rPr lang="en-US"/>
               <a:t>Second level</a:t>
             </a:r>
           </a:p>
           <a:p>
             <a:pPr lvl="2"/>
             <a:r>
-              <a:rPr lang="en-US" smtClean="0"/>
+              <a:rPr lang="en-US"/>
               <a:t>Third level</a:t>
             </a:r>
           </a:p>
           <a:p>
             <a:pPr lvl="3"/>
             <a:r>
-              <a:rPr lang="en-US" smtClean="0"/>
+              <a:rPr lang="en-US"/>
               <a:t>Fourth level</a:t>
             </a:r>
           </a:p>
           <a:p>
             <a:pPr lvl="4"/>
             <a:r>
-              <a:rPr lang="en-US" smtClean="0"/>
+              <a:rPr lang="en-US"/>
               <a:t>Fifth level</a:t>
             </a:r>
-            <a:endParaRPr lang="en-US"/>
           </a:p>
         </p:txBody>
       </p:sp>
@@ -1667,7 +1669,7 @@
           <a:p>
             <a:pPr lvl="0"/>
             <a:r>
-              <a:rPr lang="en-US" smtClean="0"/>
+              <a:rPr lang="en-US"/>
               <a:t>Click to edit Master text styles</a:t>
             </a:r>
           </a:p>
@@ -1723,38 +1725,37 @@
           <a:p>
             <a:pPr lvl="0"/>
             <a:r>
-              <a:rPr lang="en-US" smtClean="0"/>
+              <a:rPr lang="en-US"/>
               <a:t>Click to edit Master text styles</a:t>
             </a:r>
           </a:p>
           <a:p>
             <a:pPr lvl="1"/>
             <a:r>
-              <a:rPr lang="en-US" smtClean="0"/>
+              <a:rPr lang="en-US"/>
               <a:t>Second level</a:t>
             </a:r>
           </a:p>
           <a:p>
             <a:pPr lvl="2"/>
             <a:r>
-              <a:rPr lang="en-US" smtClean="0"/>
+              <a:rPr lang="en-US"/>
               <a:t>Third level</a:t>
             </a:r>
           </a:p>
           <a:p>
             <a:pPr lvl="3"/>
             <a:r>
-              <a:rPr lang="en-US" smtClean="0"/>
+              <a:rPr lang="en-US"/>
               <a:t>Fourth level</a:t>
             </a:r>
           </a:p>
           <a:p>
             <a:pPr lvl="4"/>
             <a:r>
-              <a:rPr lang="en-US" smtClean="0"/>
+              <a:rPr lang="en-US"/>
               <a:t>Fifth level</a:t>
             </a:r>
-            <a:endParaRPr lang="en-US"/>
           </a:p>
         </p:txBody>
       </p:sp>
@@ -1775,7 +1776,7 @@
           <a:p>
             <a:fld id="{5BCAD085-E8A6-8845-BD4E-CB4CCA059FC4}" type="datetimeFigureOut">
               <a:rPr lang="en-US" smtClean="0"/>
-              <a:t>1/27/13</a:t>
+              <a:t>8/13/2026</a:t>
             </a:fld>
             <a:endParaRPr lang="en-US"/>
           </a:p>
@@ -1869,10 +1870,9 @@
           <a:lstStyle/>
           <a:p>
             <a:r>
-              <a:rPr lang="en-US" smtClean="0"/>
+              <a:rPr lang="en-US"/>
               <a:t>Click to edit Master title style</a:t>
             </a:r>
-            <a:endParaRPr lang="en-US"/>
           </a:p>
         </p:txBody>
       </p:sp>
@@ -1893,7 +1893,7 @@
           <a:p>
             <a:fld id="{5BCAD085-E8A6-8845-BD4E-CB4CCA059FC4}" type="datetimeFigureOut">
               <a:rPr lang="en-US" smtClean="0"/>
-              <a:t>1/27/13</a:t>
+              <a:t>8/13/2026</a:t>
             </a:fld>
             <a:endParaRPr lang="en-US"/>
           </a:p>
@@ -1988,7 +1988,7 @@
           <a:p>
             <a:fld id="{5BCAD085-E8A6-8845-BD4E-CB4CCA059FC4}" type="datetimeFigureOut">
               <a:rPr lang="en-US" smtClean="0"/>
-              <a:t>1/27/13</a:t>
+              <a:t>8/13/2026</a:t>
             </a:fld>
             <a:endParaRPr lang="en-US"/>
           </a:p>
@@ -2091,10 +2091,9 @@
           </a:lstStyle>
           <a:p>
             <a:r>
-              <a:rPr lang="en-US" smtClean="0"/>
+              <a:rPr lang="en-US"/>
               <a:t>Click to edit Master title style</a:t>
             </a:r>
-            <a:endParaRPr lang="en-US"/>
           </a:p>
         </p:txBody>
       </p:sp>
@@ -2148,38 +2147,37 @@
           <a:p>
             <a:pPr lvl="0"/>
             <a:r>
-              <a:rPr lang="en-US" smtClean="0"/>
+              <a:rPr lang="en-US"/>
               <a:t>Click to edit Master text styles</a:t>
             </a:r>
           </a:p>
           <a:p>
             <a:pPr lvl="1"/>
             <a:r>
-              <a:rPr lang="en-US" smtClean="0"/>
+              <a:rPr lang="en-US"/>
               <a:t>Second level</a:t>
             </a:r>
           </a:p>
           <a:p>
             <a:pPr lvl="2"/>
             <a:r>
-              <a:rPr lang="en-US" smtClean="0"/>
+              <a:rPr lang="en-US"/>
               <a:t>Third level</a:t>
             </a:r>
           </a:p>
           <a:p>
             <a:pPr lvl="3"/>
             <a:r>
-              <a:rPr lang="en-US" smtClean="0"/>
+              <a:rPr lang="en-US"/>
               <a:t>Fourth level</a:t>
             </a:r>
           </a:p>
           <a:p>
             <a:pPr lvl="4"/>
             <a:r>
-              <a:rPr lang="en-US" smtClean="0"/>
+              <a:rPr lang="en-US"/>
               <a:t>Fifth level</a:t>
             </a:r>
-            <a:endParaRPr lang="en-US"/>
           </a:p>
         </p:txBody>
       </p:sp>
@@ -2242,7 +2240,7 @@
           <a:p>
             <a:pPr lvl="0"/>
             <a:r>
-              <a:rPr lang="en-US" smtClean="0"/>
+              <a:rPr lang="en-US"/>
               <a:t>Click to edit Master text styles</a:t>
             </a:r>
           </a:p>
@@ -2265,7 +2263,7 @@
           <a:p>
             <a:fld id="{5BCAD085-E8A6-8845-BD4E-CB4CCA059FC4}" type="datetimeFigureOut">
               <a:rPr lang="en-US" smtClean="0"/>
-              <a:t>1/27/13</a:t>
+              <a:t>8/13/2026</a:t>
             </a:fld>
             <a:endParaRPr lang="en-US"/>
           </a:p>
@@ -2368,10 +2366,9 @@
           </a:lstStyle>
           <a:p>
             <a:r>
-              <a:rPr lang="en-US" smtClean="0"/>
+              <a:rPr lang="en-US"/>
               <a:t>Click to edit Master title style</a:t>
             </a:r>
-            <a:endParaRPr lang="en-US"/>
           </a:p>
         </p:txBody>
       </p:sp>
@@ -2495,7 +2492,7 @@
           <a:p>
             <a:pPr lvl="0"/>
             <a:r>
-              <a:rPr lang="en-US" smtClean="0"/>
+              <a:rPr lang="en-US"/>
               <a:t>Click to edit Master text styles</a:t>
             </a:r>
           </a:p>
@@ -2518,7 +2515,7 @@
           <a:p>
             <a:fld id="{5BCAD085-E8A6-8845-BD4E-CB4CCA059FC4}" type="datetimeFigureOut">
               <a:rPr lang="en-US" smtClean="0"/>
-              <a:t>1/27/13</a:t>
+              <a:t>8/13/2026</a:t>
             </a:fld>
             <a:endParaRPr lang="en-US"/>
           </a:p>
@@ -2627,10 +2624,9 @@
           <a:lstStyle/>
           <a:p>
             <a:r>
-              <a:rPr lang="en-US" smtClean="0"/>
+              <a:rPr lang="en-US"/>
               <a:t>Click to edit Master title style</a:t>
             </a:r>
-            <a:endParaRPr lang="en-US"/>
           </a:p>
         </p:txBody>
       </p:sp>
@@ -2661,38 +2657,37 @@
           <a:p>
             <a:pPr lvl="0"/>
             <a:r>
-              <a:rPr lang="en-US" smtClean="0"/>
+              <a:rPr lang="en-US"/>
               <a:t>Click to edit Master text styles</a:t>
             </a:r>
           </a:p>
           <a:p>
             <a:pPr lvl="1"/>
             <a:r>
-              <a:rPr lang="en-US" smtClean="0"/>
+              <a:rPr lang="en-US"/>
               <a:t>Second level</a:t>
             </a:r>
           </a:p>
           <a:p>
             <a:pPr lvl="2"/>
             <a:r>
-              <a:rPr lang="en-US" smtClean="0"/>
+              <a:rPr lang="en-US"/>
               <a:t>Third level</a:t>
             </a:r>
           </a:p>
           <a:p>
             <a:pPr lvl="3"/>
             <a:r>
-              <a:rPr lang="en-US" smtClean="0"/>
+              <a:rPr lang="en-US"/>
               <a:t>Fourth level</a:t>
             </a:r>
           </a:p>
           <a:p>
             <a:pPr lvl="4"/>
             <a:r>
-              <a:rPr lang="en-US" smtClean="0"/>
+              <a:rPr lang="en-US"/>
               <a:t>Fifth level</a:t>
             </a:r>
-            <a:endParaRPr lang="en-US"/>
           </a:p>
         </p:txBody>
       </p:sp>
@@ -2731,7 +2726,7 @@
           <a:p>
             <a:fld id="{5BCAD085-E8A6-8845-BD4E-CB4CCA059FC4}" type="datetimeFigureOut">
               <a:rPr lang="en-US" smtClean="0"/>
-              <a:t>1/27/13</a:t>
+              <a:t>8/13/2026</a:t>
             </a:fld>
             <a:endParaRPr lang="en-US"/>
           </a:p>
@@ -3090,7 +3085,7 @@
 </file>
 
 <file path=ppt/slides/slide1.xml><?xml version="1.0" encoding="utf-8"?>
-<p:sld xmlns:a="http://schemas.openxmlformats.org/drawingml/2006/main" xmlns:p="http://schemas.openxmlformats.org/presentationml/2006/main" xmlns:r="http://schemas.openxmlformats.org/officeDocument/2006/relationships">
+<p:sld xmlns:a="http://schemas.openxmlformats.org/drawingml/2006/main" xmlns:r="http://schemas.openxmlformats.org/officeDocument/2006/relationships" xmlns:p="http://schemas.openxmlformats.org/presentationml/2006/main">
   <p:cSld>
     <p:spTree>
       <p:nvGrpSpPr>
@@ -3098,7 +3093,14 @@
         <p:cNvGrpSpPr/>
         <p:nvPr/>
       </p:nvGrpSpPr>
-      <p:grpSpPr/>
+      <p:grpSpPr>
+        <a:xfrm>
+          <a:off x="0" y="0"/>
+          <a:ext cx="0" cy="0"/>
+          <a:chOff x="0" y="0"/>
+          <a:chExt cx="0" cy="0"/>
+        </a:xfrm>
+      </p:grpSpPr>
       <p:sp>
         <p:nvSpPr>
           <p:cNvPr id="2" name="Rectangle 1"/>
@@ -3138,7 +3140,9 @@
         <p:txBody>
           <a:bodyPr rtlCol="0" anchor="ctr"/>
           <a:lstStyle/>
-          <a:p/>
+          <a:p>
+            <a:endParaRPr/>
+          </a:p>
         </p:txBody>
       </p:sp>
       <p:sp>
@@ -3180,7 +3184,9 @@
         <p:txBody>
           <a:bodyPr rtlCol="0" anchor="ctr"/>
           <a:lstStyle/>
-          <a:p/>
+          <a:p>
+            <a:endParaRPr/>
+          </a:p>
         </p:txBody>
       </p:sp>
       <p:sp>
@@ -3222,7 +3228,9 @@
         <p:txBody>
           <a:bodyPr rtlCol="0" anchor="ctr"/>
           <a:lstStyle/>
-          <a:p/>
+          <a:p>
+            <a:endParaRPr/>
+          </a:p>
         </p:txBody>
       </p:sp>
       <p:sp>
@@ -3264,7 +3272,9 @@
         <p:txBody>
           <a:bodyPr rtlCol="0" anchor="ctr"/>
           <a:lstStyle/>
-          <a:p/>
+          <a:p>
+            <a:endParaRPr/>
+          </a:p>
         </p:txBody>
       </p:sp>
       <p:sp>
@@ -3425,7 +3435,9 @@
         <p:txBody>
           <a:bodyPr rtlCol="0" anchor="ctr"/>
           <a:lstStyle/>
-          <a:p/>
+          <a:p>
+            <a:endParaRPr/>
+          </a:p>
         </p:txBody>
       </p:sp>
       <p:sp>
@@ -3437,7 +3449,7 @@
         <p:spPr>
           <a:xfrm>
             <a:off x="914400" y="4526280"/>
-            <a:ext cx="6035040" cy="1097280"/>
+            <a:ext cx="6035040" cy="820738"/>
           </a:xfrm>
           <a:prstGeom prst="rect">
             <a:avLst/>
@@ -3462,8 +3474,140 @@
               </a:defRPr>
             </a:pPr>
             <a:r>
-              <a:t>Lập trình cho Khoa học dữ liệu · Nhà sách và văn phòng phẩm</a:t>
-            </a:r>
+              <a:rPr dirty="0" err="1"/>
+              <a:t>Lập</a:t>
+            </a:r>
+            <a:r>
+              <a:rPr dirty="0"/>
+              <a:t> </a:t>
+            </a:r>
+            <a:r>
+              <a:rPr dirty="0" err="1"/>
+              <a:t>trình</a:t>
+            </a:r>
+            <a:r>
+              <a:rPr dirty="0"/>
+              <a:t> </a:t>
+            </a:r>
+            <a:r>
+              <a:rPr dirty="0" err="1"/>
+              <a:t>cho</a:t>
+            </a:r>
+            <a:r>
+              <a:rPr dirty="0"/>
+              <a:t> Khoa </a:t>
+            </a:r>
+            <a:r>
+              <a:rPr dirty="0" err="1"/>
+              <a:t>học</a:t>
+            </a:r>
+            <a:r>
+              <a:rPr dirty="0"/>
+              <a:t> </a:t>
+            </a:r>
+            <a:r>
+              <a:rPr dirty="0" err="1"/>
+              <a:t>dữ</a:t>
+            </a:r>
+            <a:r>
+              <a:rPr dirty="0"/>
+              <a:t> </a:t>
+            </a:r>
+            <a:r>
+              <a:rPr dirty="0" err="1"/>
+              <a:t>liệu</a:t>
+            </a:r>
+            <a:r>
+              <a:rPr dirty="0"/>
+              <a:t> · </a:t>
+            </a:r>
+            <a:r>
+              <a:rPr dirty="0" err="1"/>
+              <a:t>Nhà</a:t>
+            </a:r>
+            <a:r>
+              <a:rPr dirty="0"/>
+              <a:t> </a:t>
+            </a:r>
+            <a:r>
+              <a:rPr dirty="0" err="1"/>
+              <a:t>sách</a:t>
+            </a:r>
+            <a:r>
+              <a:rPr dirty="0"/>
+              <a:t> </a:t>
+            </a:r>
+            <a:r>
+              <a:rPr dirty="0" err="1"/>
+              <a:t>và</a:t>
+            </a:r>
+            <a:r>
+              <a:rPr dirty="0"/>
+              <a:t> </a:t>
+            </a:r>
+            <a:r>
+              <a:rPr dirty="0" err="1"/>
+              <a:t>văn</a:t>
+            </a:r>
+            <a:r>
+              <a:rPr dirty="0"/>
+              <a:t> </a:t>
+            </a:r>
+            <a:r>
+              <a:rPr dirty="0" err="1"/>
+              <a:t>phòng</a:t>
+            </a:r>
+            <a:r>
+              <a:rPr dirty="0"/>
+              <a:t> </a:t>
+            </a:r>
+            <a:r>
+              <a:rPr dirty="0" err="1"/>
+              <a:t>phẩm</a:t>
+            </a:r>
+            <a:endParaRPr dirty="0"/>
+          </a:p>
+          <a:p>
+            <a:pPr>
+              <a:spcAft>
+                <a:spcPts val="500"/>
+              </a:spcAft>
+              <a:defRPr sz="1300" b="0">
+                <a:solidFill>
+                  <a:srgbClr val="B2C3D2"/>
+                </a:solidFill>
+                <a:latin typeface="Segoe UI"/>
+              </a:defRPr>
+            </a:pPr>
+            <a:r>
+              <a:rPr dirty="0"/>
+              <a:t>Học </a:t>
+            </a:r>
+            <a:r>
+              <a:rPr dirty="0" err="1"/>
+              <a:t>viên</a:t>
+            </a:r>
+            <a:r>
+              <a:rPr dirty="0"/>
+              <a:t>: </a:t>
+            </a:r>
+            <a:r>
+              <a:rPr lang="en-US" dirty="0" err="1"/>
+              <a:t>Đỗ</a:t>
+            </a:r>
+            <a:r>
+              <a:rPr lang="en-US" dirty="0"/>
+              <a:t> Thị Lan</a:t>
+            </a:r>
+            <a:r>
+              <a:rPr dirty="0"/>
+              <a:t>    MSSV: </a:t>
+            </a:r>
+            <a:r>
+              <a:rPr lang="en-US" sz="1300" dirty="0"/>
+              <a:t>2582003122</a:t>
+            </a:r>
+            <a:endParaRPr dirty="0"/>
           </a:p>
           <a:p>
             <a:pPr algn="l">
@@ -3478,23 +3622,40 @@
               </a:defRPr>
             </a:pPr>
             <a:r>
-              <a:t>Học viên: ……………………………    MSSV: ……………………</a:t>
-            </a:r>
-          </a:p>
-          <a:p>
-            <a:pPr algn="l">
-              <a:spcAft>
-                <a:spcPts val="500"/>
-              </a:spcAft>
-              <a:defRPr sz="1300" b="0">
-                <a:solidFill>
-                  <a:srgbClr val="B2C3D2"/>
-                </a:solidFill>
-                <a:latin typeface="Segoe UI"/>
-              </a:defRPr>
-            </a:pPr>
-            <a:r>
-              <a:t>Giảng viên: ……………………………             Tháng 08/2026</a:t>
+              <a:rPr dirty="0" err="1"/>
+              <a:t>Giảng</a:t>
+            </a:r>
+            <a:r>
+              <a:rPr dirty="0"/>
+              <a:t> </a:t>
+            </a:r>
+            <a:r>
+              <a:rPr dirty="0" err="1"/>
+              <a:t>viên</a:t>
+            </a:r>
+            <a:r>
+              <a:rPr dirty="0"/>
+              <a:t>: </a:t>
+            </a:r>
+            <a:r>
+              <a:rPr lang="en-US" dirty="0"/>
+              <a:t>Nguyễn Duy </a:t>
+            </a:r>
+            <a:r>
+              <a:rPr lang="en-US" dirty="0" err="1"/>
+              <a:t>Hàm</a:t>
+            </a:r>
+            <a:r>
+              <a:rPr dirty="0"/>
+              <a:t>             </a:t>
+            </a:r>
+            <a:r>
+              <a:rPr dirty="0" err="1"/>
+              <a:t>Tháng</a:t>
+            </a:r>
+            <a:r>
+              <a:rPr dirty="0"/>
+              <a:t> 08/2026</a:t>
             </a:r>
           </a:p>
         </p:txBody>
@@ -3540,7 +3701,9 @@
         <p:txBody>
           <a:bodyPr rtlCol="0" anchor="ctr"/>
           <a:lstStyle/>
-          <a:p/>
+          <a:p>
+            <a:endParaRPr/>
+          </a:p>
         </p:txBody>
       </p:sp>
       <p:sp>
@@ -3582,7 +3745,9 @@
         <p:txBody>
           <a:bodyPr rtlCol="0" anchor="ctr"/>
           <a:lstStyle/>
-          <a:p/>
+          <a:p>
+            <a:endParaRPr/>
+          </a:p>
         </p:txBody>
       </p:sp>
       <p:sp>
@@ -3681,7 +3846,9 @@
         <p:txBody>
           <a:bodyPr rtlCol="0" anchor="ctr"/>
           <a:lstStyle/>
-          <a:p/>
+          <a:p>
+            <a:endParaRPr/>
+          </a:p>
         </p:txBody>
       </p:sp>
       <p:sp>
@@ -3723,7 +3890,9 @@
         <p:txBody>
           <a:bodyPr rtlCol="0" anchor="ctr"/>
           <a:lstStyle/>
-          <a:p/>
+          <a:p>
+            <a:endParaRPr/>
+          </a:p>
         </p:txBody>
       </p:sp>
       <p:sp>
@@ -3822,7 +3991,9 @@
         <p:txBody>
           <a:bodyPr rtlCol="0" anchor="ctr"/>
           <a:lstStyle/>
-          <a:p/>
+          <a:p>
+            <a:endParaRPr/>
+          </a:p>
         </p:txBody>
       </p:sp>
       <p:sp>
@@ -3864,7 +4035,9 @@
         <p:txBody>
           <a:bodyPr rtlCol="0" anchor="ctr"/>
           <a:lstStyle/>
-          <a:p/>
+          <a:p>
+            <a:endParaRPr/>
+          </a:p>
         </p:txBody>
       </p:sp>
       <p:sp>
@@ -3963,7 +4136,9 @@
         <p:txBody>
           <a:bodyPr rtlCol="0" anchor="ctr"/>
           <a:lstStyle/>
-          <a:p/>
+          <a:p>
+            <a:endParaRPr/>
+          </a:p>
         </p:txBody>
       </p:sp>
       <p:sp>
@@ -4005,7 +4180,9 @@
         <p:txBody>
           <a:bodyPr rtlCol="0" anchor="ctr"/>
           <a:lstStyle/>
-          <a:p/>
+          <a:p>
+            <a:endParaRPr/>
+          </a:p>
         </p:txBody>
       </p:sp>
       <p:sp>
@@ -4072,7 +4249,7 @@
 </file>
 
 <file path=ppt/slides/slide10.xml><?xml version="1.0" encoding="utf-8"?>
-<p:sld xmlns:a="http://schemas.openxmlformats.org/drawingml/2006/main" xmlns:p="http://schemas.openxmlformats.org/presentationml/2006/main" xmlns:r="http://schemas.openxmlformats.org/officeDocument/2006/relationships">
+<p:sld xmlns:a="http://schemas.openxmlformats.org/drawingml/2006/main" xmlns:r="http://schemas.openxmlformats.org/officeDocument/2006/relationships" xmlns:p="http://schemas.openxmlformats.org/presentationml/2006/main">
   <p:cSld>
     <p:spTree>
       <p:nvGrpSpPr>
@@ -4080,7 +4257,14 @@
         <p:cNvGrpSpPr/>
         <p:nvPr/>
       </p:nvGrpSpPr>
-      <p:grpSpPr/>
+      <p:grpSpPr>
+        <a:xfrm>
+          <a:off x="0" y="0"/>
+          <a:ext cx="0" cy="0"/>
+          <a:chOff x="0" y="0"/>
+          <a:chExt cx="0" cy="0"/>
+        </a:xfrm>
+      </p:grpSpPr>
       <p:sp>
         <p:nvSpPr>
           <p:cNvPr id="2" name="Rectangle 1"/>
@@ -4120,7 +4304,9 @@
         <p:txBody>
           <a:bodyPr rtlCol="0" anchor="ctr"/>
           <a:lstStyle/>
-          <a:p/>
+          <a:p>
+            <a:endParaRPr/>
+          </a:p>
         </p:txBody>
       </p:sp>
       <p:sp>
@@ -4162,7 +4348,9 @@
         <p:txBody>
           <a:bodyPr rtlCol="0" anchor="ctr"/>
           <a:lstStyle/>
-          <a:p/>
+          <a:p>
+            <a:endParaRPr/>
+          </a:p>
         </p:txBody>
       </p:sp>
       <p:sp>
@@ -4259,7 +4447,9 @@
         <p:txBody>
           <a:bodyPr rtlCol="0" anchor="ctr"/>
           <a:lstStyle/>
-          <a:p/>
+          <a:p>
+            <a:endParaRPr/>
+          </a:p>
         </p:txBody>
       </p:sp>
       <p:sp>
@@ -4383,7 +4573,9 @@
         <p:txBody>
           <a:bodyPr rtlCol="0" anchor="ctr"/>
           <a:lstStyle/>
-          <a:p/>
+          <a:p>
+            <a:endParaRPr/>
+          </a:p>
         </p:txBody>
       </p:sp>
       <p:pic>
@@ -4429,15 +4621,39 @@
                 <a:tableStyleId>{5C22544A-7EE6-4342-B048-85BDC9FD1C3A}</a:tableStyleId>
               </a:tblPr>
               <a:tblGrid>
-                <a:gridCol w="2293315"/>
-                <a:gridCol w="972921"/>
-                <a:gridCol w="972921"/>
-                <a:gridCol w="972921"/>
+                <a:gridCol w="2293315">
+                  <a:extLst>
+                    <a:ext uri="{9D8B030D-6E8A-4147-A177-3AD203B41FA5}">
+                      <a16:colId xmlns:a16="http://schemas.microsoft.com/office/drawing/2014/main" val="20000"/>
+                    </a:ext>
+                  </a:extLst>
+                </a:gridCol>
+                <a:gridCol w="972921">
+                  <a:extLst>
+                    <a:ext uri="{9D8B030D-6E8A-4147-A177-3AD203B41FA5}">
+                      <a16:colId xmlns:a16="http://schemas.microsoft.com/office/drawing/2014/main" val="20001"/>
+                    </a:ext>
+                  </a:extLst>
+                </a:gridCol>
+                <a:gridCol w="972921">
+                  <a:extLst>
+                    <a:ext uri="{9D8B030D-6E8A-4147-A177-3AD203B41FA5}">
+                      <a16:colId xmlns:a16="http://schemas.microsoft.com/office/drawing/2014/main" val="20002"/>
+                    </a:ext>
+                  </a:extLst>
+                </a:gridCol>
+                <a:gridCol w="972921">
+                  <a:extLst>
+                    <a:ext uri="{9D8B030D-6E8A-4147-A177-3AD203B41FA5}">
+                      <a16:colId xmlns:a16="http://schemas.microsoft.com/office/drawing/2014/main" val="20003"/>
+                    </a:ext>
+                  </a:extLst>
+                </a:gridCol>
               </a:tblGrid>
               <a:tr h="384048">
                 <a:tc>
                   <a:txBody>
-                    <a:bodyPr wrap="square"/>
+                    <a:bodyPr/>
                     <a:lstStyle/>
                     <a:p>
                       <a:pPr algn="l">
@@ -4464,7 +4680,7 @@
                 </a:tc>
                 <a:tc>
                   <a:txBody>
-                    <a:bodyPr wrap="square"/>
+                    <a:bodyPr/>
                     <a:lstStyle/>
                     <a:p>
                       <a:pPr algn="r">
@@ -4491,7 +4707,7 @@
                 </a:tc>
                 <a:tc>
                   <a:txBody>
-                    <a:bodyPr wrap="square"/>
+                    <a:bodyPr/>
                     <a:lstStyle/>
                     <a:p>
                       <a:pPr algn="r">
@@ -4518,7 +4734,7 @@
                 </a:tc>
                 <a:tc>
                   <a:txBody>
-                    <a:bodyPr wrap="square"/>
+                    <a:bodyPr/>
                     <a:lstStyle/>
                     <a:p>
                       <a:pPr algn="r">
@@ -4543,11 +4759,16 @@
                     </a:solidFill>
                   </a:tcPr>
                 </a:tc>
+                <a:extLst>
+                  <a:ext uri="{0D108BD9-81ED-4DB2-BD59-A6C34878D82A}">
+                    <a16:rowId xmlns:a16="http://schemas.microsoft.com/office/drawing/2014/main" val="10000"/>
+                  </a:ext>
+                </a:extLst>
               </a:tr>
               <a:tr h="384048">
                 <a:tc>
                   <a:txBody>
-                    <a:bodyPr wrap="square"/>
+                    <a:bodyPr/>
                     <a:lstStyle/>
                     <a:p>
                       <a:pPr algn="l">
@@ -4574,7 +4795,7 @@
                 </a:tc>
                 <a:tc>
                   <a:txBody>
-                    <a:bodyPr wrap="square"/>
+                    <a:bodyPr/>
                     <a:lstStyle/>
                     <a:p>
                       <a:pPr algn="r">
@@ -4601,7 +4822,7 @@
                 </a:tc>
                 <a:tc>
                   <a:txBody>
-                    <a:bodyPr wrap="square"/>
+                    <a:bodyPr/>
                     <a:lstStyle/>
                     <a:p>
                       <a:pPr algn="r">
@@ -4628,7 +4849,7 @@
                 </a:tc>
                 <a:tc>
                   <a:txBody>
-                    <a:bodyPr wrap="square"/>
+                    <a:bodyPr/>
                     <a:lstStyle/>
                     <a:p>
                       <a:pPr algn="r">
@@ -4653,11 +4874,16 @@
                     </a:solidFill>
                   </a:tcPr>
                 </a:tc>
+                <a:extLst>
+                  <a:ext uri="{0D108BD9-81ED-4DB2-BD59-A6C34878D82A}">
+                    <a16:rowId xmlns:a16="http://schemas.microsoft.com/office/drawing/2014/main" val="10001"/>
+                  </a:ext>
+                </a:extLst>
               </a:tr>
               <a:tr h="384048">
                 <a:tc>
                   <a:txBody>
-                    <a:bodyPr wrap="square"/>
+                    <a:bodyPr/>
                     <a:lstStyle/>
                     <a:p>
                       <a:pPr algn="l">
@@ -4684,7 +4910,7 @@
                 </a:tc>
                 <a:tc>
                   <a:txBody>
-                    <a:bodyPr wrap="square"/>
+                    <a:bodyPr/>
                     <a:lstStyle/>
                     <a:p>
                       <a:pPr algn="r">
@@ -4711,7 +4937,7 @@
                 </a:tc>
                 <a:tc>
                   <a:txBody>
-                    <a:bodyPr wrap="square"/>
+                    <a:bodyPr/>
                     <a:lstStyle/>
                     <a:p>
                       <a:pPr algn="r">
@@ -4738,7 +4964,7 @@
                 </a:tc>
                 <a:tc>
                   <a:txBody>
-                    <a:bodyPr wrap="square"/>
+                    <a:bodyPr/>
                     <a:lstStyle/>
                     <a:p>
                       <a:pPr algn="r">
@@ -4763,11 +4989,16 @@
                     </a:solidFill>
                   </a:tcPr>
                 </a:tc>
+                <a:extLst>
+                  <a:ext uri="{0D108BD9-81ED-4DB2-BD59-A6C34878D82A}">
+                    <a16:rowId xmlns:a16="http://schemas.microsoft.com/office/drawing/2014/main" val="10002"/>
+                  </a:ext>
+                </a:extLst>
               </a:tr>
               <a:tr h="384048">
                 <a:tc>
                   <a:txBody>
-                    <a:bodyPr wrap="square"/>
+                    <a:bodyPr/>
                     <a:lstStyle/>
                     <a:p>
                       <a:pPr algn="l">
@@ -4794,7 +5025,7 @@
                 </a:tc>
                 <a:tc>
                   <a:txBody>
-                    <a:bodyPr wrap="square"/>
+                    <a:bodyPr/>
                     <a:lstStyle/>
                     <a:p>
                       <a:pPr algn="r">
@@ -4821,7 +5052,7 @@
                 </a:tc>
                 <a:tc>
                   <a:txBody>
-                    <a:bodyPr wrap="square"/>
+                    <a:bodyPr/>
                     <a:lstStyle/>
                     <a:p>
                       <a:pPr algn="r">
@@ -4848,7 +5079,7 @@
                 </a:tc>
                 <a:tc>
                   <a:txBody>
-                    <a:bodyPr wrap="square"/>
+                    <a:bodyPr/>
                     <a:lstStyle/>
                     <a:p>
                       <a:pPr algn="r">
@@ -4873,11 +5104,16 @@
                     </a:solidFill>
                   </a:tcPr>
                 </a:tc>
+                <a:extLst>
+                  <a:ext uri="{0D108BD9-81ED-4DB2-BD59-A6C34878D82A}">
+                    <a16:rowId xmlns:a16="http://schemas.microsoft.com/office/drawing/2014/main" val="10003"/>
+                  </a:ext>
+                </a:extLst>
               </a:tr>
               <a:tr h="384048">
                 <a:tc>
                   <a:txBody>
-                    <a:bodyPr wrap="square"/>
+                    <a:bodyPr/>
                     <a:lstStyle/>
                     <a:p>
                       <a:pPr algn="l">
@@ -4904,7 +5140,7 @@
                 </a:tc>
                 <a:tc>
                   <a:txBody>
-                    <a:bodyPr wrap="square"/>
+                    <a:bodyPr/>
                     <a:lstStyle/>
                     <a:p>
                       <a:pPr algn="r">
@@ -4931,7 +5167,7 @@
                 </a:tc>
                 <a:tc>
                   <a:txBody>
-                    <a:bodyPr wrap="square"/>
+                    <a:bodyPr/>
                     <a:lstStyle/>
                     <a:p>
                       <a:pPr algn="r">
@@ -4958,7 +5194,7 @@
                 </a:tc>
                 <a:tc>
                   <a:txBody>
-                    <a:bodyPr wrap="square"/>
+                    <a:bodyPr/>
                     <a:lstStyle/>
                     <a:p>
                       <a:pPr algn="r">
@@ -4983,6 +5219,11 @@
                     </a:solidFill>
                   </a:tcPr>
                 </a:tc>
+                <a:extLst>
+                  <a:ext uri="{0D108BD9-81ED-4DB2-BD59-A6C34878D82A}">
+                    <a16:rowId xmlns:a16="http://schemas.microsoft.com/office/drawing/2014/main" val="10004"/>
+                  </a:ext>
+                </a:extLst>
               </a:tr>
             </a:tbl>
           </a:graphicData>
@@ -5031,7 +5272,9 @@
         <p:txBody>
           <a:bodyPr rtlCol="0" anchor="ctr"/>
           <a:lstStyle/>
-          <a:p/>
+          <a:p>
+            <a:endParaRPr/>
+          </a:p>
         </p:txBody>
       </p:sp>
       <p:sp>
@@ -5112,7 +5355,9 @@
         <p:txBody>
           <a:bodyPr rtlCol="0" anchor="ctr"/>
           <a:lstStyle/>
-          <a:p/>
+          <a:p>
+            <a:endParaRPr/>
+          </a:p>
         </p:txBody>
       </p:sp>
       <p:sp>
@@ -5196,7 +5441,9 @@
         <p:txBody>
           <a:bodyPr rtlCol="0" anchor="ctr"/>
           <a:lstStyle/>
-          <a:p/>
+          <a:p>
+            <a:endParaRPr/>
+          </a:p>
         </p:txBody>
       </p:sp>
       <p:sp>
@@ -5280,7 +5527,9 @@
         <p:txBody>
           <a:bodyPr rtlCol="0" anchor="ctr"/>
           <a:lstStyle/>
-          <a:p/>
+          <a:p>
+            <a:endParaRPr/>
+          </a:p>
         </p:txBody>
       </p:sp>
       <p:sp>
@@ -5364,7 +5613,9 @@
         <p:txBody>
           <a:bodyPr rtlCol="0" anchor="ctr"/>
           <a:lstStyle/>
-          <a:p/>
+          <a:p>
+            <a:endParaRPr/>
+          </a:p>
         </p:txBody>
       </p:sp>
       <p:sp>
@@ -5452,7 +5703,9 @@
         <p:txBody>
           <a:bodyPr rtlCol="0" anchor="ctr"/>
           <a:lstStyle/>
-          <a:p/>
+          <a:p>
+            <a:endParaRPr/>
+          </a:p>
         </p:txBody>
       </p:sp>
       <p:sp>
@@ -5542,7 +5795,7 @@
 </file>
 
 <file path=ppt/slides/slide11.xml><?xml version="1.0" encoding="utf-8"?>
-<p:sld xmlns:a="http://schemas.openxmlformats.org/drawingml/2006/main" xmlns:p="http://schemas.openxmlformats.org/presentationml/2006/main" xmlns:r="http://schemas.openxmlformats.org/officeDocument/2006/relationships">
+<p:sld xmlns:a="http://schemas.openxmlformats.org/drawingml/2006/main" xmlns:r="http://schemas.openxmlformats.org/officeDocument/2006/relationships" xmlns:p="http://schemas.openxmlformats.org/presentationml/2006/main">
   <p:cSld>
     <p:spTree>
       <p:nvGrpSpPr>
@@ -5550,7 +5803,14 @@
         <p:cNvGrpSpPr/>
         <p:nvPr/>
       </p:nvGrpSpPr>
-      <p:grpSpPr/>
+      <p:grpSpPr>
+        <a:xfrm>
+          <a:off x="0" y="0"/>
+          <a:ext cx="0" cy="0"/>
+          <a:chOff x="0" y="0"/>
+          <a:chExt cx="0" cy="0"/>
+        </a:xfrm>
+      </p:grpSpPr>
       <p:sp>
         <p:nvSpPr>
           <p:cNvPr id="2" name="Rectangle 1"/>
@@ -5590,7 +5850,9 @@
         <p:txBody>
           <a:bodyPr rtlCol="0" anchor="ctr"/>
           <a:lstStyle/>
-          <a:p/>
+          <a:p>
+            <a:endParaRPr/>
+          </a:p>
         </p:txBody>
       </p:sp>
       <p:sp>
@@ -5632,7 +5894,9 @@
         <p:txBody>
           <a:bodyPr rtlCol="0" anchor="ctr"/>
           <a:lstStyle/>
-          <a:p/>
+          <a:p>
+            <a:endParaRPr/>
+          </a:p>
         </p:txBody>
       </p:sp>
       <p:sp>
@@ -5729,7 +5993,9 @@
         <p:txBody>
           <a:bodyPr rtlCol="0" anchor="ctr"/>
           <a:lstStyle/>
-          <a:p/>
+          <a:p>
+            <a:endParaRPr/>
+          </a:p>
         </p:txBody>
       </p:sp>
       <p:sp>
@@ -5853,7 +6119,9 @@
         <p:txBody>
           <a:bodyPr rtlCol="0" anchor="ctr"/>
           <a:lstStyle/>
-          <a:p/>
+          <a:p>
+            <a:endParaRPr/>
+          </a:p>
         </p:txBody>
       </p:sp>
       <p:sp>
@@ -5934,7 +6202,9 @@
         <p:txBody>
           <a:bodyPr rtlCol="0" anchor="ctr"/>
           <a:lstStyle/>
-          <a:p/>
+          <a:p>
+            <a:endParaRPr/>
+          </a:p>
         </p:txBody>
       </p:sp>
       <p:sp>
@@ -6018,7 +6288,9 @@
         <p:txBody>
           <a:bodyPr rtlCol="0" anchor="ctr"/>
           <a:lstStyle/>
-          <a:p/>
+          <a:p>
+            <a:endParaRPr/>
+          </a:p>
         </p:txBody>
       </p:sp>
       <p:sp>
@@ -6102,7 +6374,9 @@
         <p:txBody>
           <a:bodyPr rtlCol="0" anchor="ctr"/>
           <a:lstStyle/>
-          <a:p/>
+          <a:p>
+            <a:endParaRPr/>
+          </a:p>
         </p:txBody>
       </p:sp>
       <p:sp>
@@ -6186,7 +6460,9 @@
         <p:txBody>
           <a:bodyPr rtlCol="0" anchor="ctr"/>
           <a:lstStyle/>
-          <a:p/>
+          <a:p>
+            <a:endParaRPr/>
+          </a:p>
         </p:txBody>
       </p:sp>
       <p:sp>
@@ -6270,7 +6546,9 @@
         <p:txBody>
           <a:bodyPr rtlCol="0" anchor="ctr"/>
           <a:lstStyle/>
-          <a:p/>
+          <a:p>
+            <a:endParaRPr/>
+          </a:p>
         </p:txBody>
       </p:sp>
       <p:sp>
@@ -6354,7 +6632,9 @@
         <p:txBody>
           <a:bodyPr rtlCol="0" anchor="ctr"/>
           <a:lstStyle/>
-          <a:p/>
+          <a:p>
+            <a:endParaRPr/>
+          </a:p>
         </p:txBody>
       </p:sp>
       <p:sp>
@@ -6442,7 +6722,9 @@
         <p:txBody>
           <a:bodyPr rtlCol="0" anchor="ctr"/>
           <a:lstStyle/>
-          <a:p/>
+          <a:p>
+            <a:endParaRPr/>
+          </a:p>
         </p:txBody>
       </p:sp>
       <p:sp>
@@ -6523,7 +6805,9 @@
         <p:txBody>
           <a:bodyPr rtlCol="0" anchor="ctr"/>
           <a:lstStyle/>
-          <a:p/>
+          <a:p>
+            <a:endParaRPr/>
+          </a:p>
         </p:txBody>
       </p:sp>
       <p:sp>
@@ -6607,7 +6891,9 @@
         <p:txBody>
           <a:bodyPr rtlCol="0" anchor="ctr"/>
           <a:lstStyle/>
-          <a:p/>
+          <a:p>
+            <a:endParaRPr/>
+          </a:p>
         </p:txBody>
       </p:sp>
       <p:sp>
@@ -6691,7 +6977,9 @@
         <p:txBody>
           <a:bodyPr rtlCol="0" anchor="ctr"/>
           <a:lstStyle/>
-          <a:p/>
+          <a:p>
+            <a:endParaRPr/>
+          </a:p>
         </p:txBody>
       </p:sp>
       <p:sp>
@@ -6775,7 +7063,9 @@
         <p:txBody>
           <a:bodyPr rtlCol="0" anchor="ctr"/>
           <a:lstStyle/>
-          <a:p/>
+          <a:p>
+            <a:endParaRPr/>
+          </a:p>
         </p:txBody>
       </p:sp>
       <p:sp>
@@ -6859,7 +7149,9 @@
         <p:txBody>
           <a:bodyPr rtlCol="0" anchor="ctr"/>
           <a:lstStyle/>
-          <a:p/>
+          <a:p>
+            <a:endParaRPr/>
+          </a:p>
         </p:txBody>
       </p:sp>
       <p:sp>
@@ -6947,7 +7239,9 @@
         <p:txBody>
           <a:bodyPr rtlCol="0" anchor="ctr"/>
           <a:lstStyle/>
-          <a:p/>
+          <a:p>
+            <a:endParaRPr/>
+          </a:p>
         </p:txBody>
       </p:sp>
       <p:sp>
@@ -7028,7 +7322,9 @@
         <p:txBody>
           <a:bodyPr rtlCol="0" anchor="ctr"/>
           <a:lstStyle/>
-          <a:p/>
+          <a:p>
+            <a:endParaRPr/>
+          </a:p>
         </p:txBody>
       </p:sp>
       <p:sp>
@@ -7112,7 +7408,9 @@
         <p:txBody>
           <a:bodyPr rtlCol="0" anchor="ctr"/>
           <a:lstStyle/>
-          <a:p/>
+          <a:p>
+            <a:endParaRPr/>
+          </a:p>
         </p:txBody>
       </p:sp>
       <p:sp>
@@ -7196,7 +7494,9 @@
         <p:txBody>
           <a:bodyPr rtlCol="0" anchor="ctr"/>
           <a:lstStyle/>
-          <a:p/>
+          <a:p>
+            <a:endParaRPr/>
+          </a:p>
         </p:txBody>
       </p:sp>
       <p:sp>
@@ -7280,7 +7580,9 @@
         <p:txBody>
           <a:bodyPr rtlCol="0" anchor="ctr"/>
           <a:lstStyle/>
-          <a:p/>
+          <a:p>
+            <a:endParaRPr/>
+          </a:p>
         </p:txBody>
       </p:sp>
       <p:sp>
@@ -7364,7 +7666,9 @@
         <p:txBody>
           <a:bodyPr rtlCol="0" anchor="ctr"/>
           <a:lstStyle/>
-          <a:p/>
+          <a:p>
+            <a:endParaRPr/>
+          </a:p>
         </p:txBody>
       </p:sp>
       <p:sp>
@@ -7418,7 +7722,7 @@
 </file>
 
 <file path=ppt/slides/slide12.xml><?xml version="1.0" encoding="utf-8"?>
-<p:sld xmlns:a="http://schemas.openxmlformats.org/drawingml/2006/main" xmlns:p="http://schemas.openxmlformats.org/presentationml/2006/main" xmlns:r="http://schemas.openxmlformats.org/officeDocument/2006/relationships">
+<p:sld xmlns:a="http://schemas.openxmlformats.org/drawingml/2006/main" xmlns:r="http://schemas.openxmlformats.org/officeDocument/2006/relationships" xmlns:p="http://schemas.openxmlformats.org/presentationml/2006/main">
   <p:cSld>
     <p:spTree>
       <p:nvGrpSpPr>
@@ -7426,7 +7730,14 @@
         <p:cNvGrpSpPr/>
         <p:nvPr/>
       </p:nvGrpSpPr>
-      <p:grpSpPr/>
+      <p:grpSpPr>
+        <a:xfrm>
+          <a:off x="0" y="0"/>
+          <a:ext cx="0" cy="0"/>
+          <a:chOff x="0" y="0"/>
+          <a:chExt cx="0" cy="0"/>
+        </a:xfrm>
+      </p:grpSpPr>
       <p:sp>
         <p:nvSpPr>
           <p:cNvPr id="2" name="Rectangle 1"/>
@@ -7466,7 +7777,9 @@
         <p:txBody>
           <a:bodyPr rtlCol="0" anchor="ctr"/>
           <a:lstStyle/>
-          <a:p/>
+          <a:p>
+            <a:endParaRPr/>
+          </a:p>
         </p:txBody>
       </p:sp>
       <p:sp>
@@ -7508,7 +7821,9 @@
         <p:txBody>
           <a:bodyPr rtlCol="0" anchor="ctr"/>
           <a:lstStyle/>
-          <a:p/>
+          <a:p>
+            <a:endParaRPr/>
+          </a:p>
         </p:txBody>
       </p:sp>
       <p:sp>
@@ -7519,8 +7834,8 @@
         </p:nvSpPr>
         <p:spPr>
           <a:xfrm>
-            <a:off x="1371600" y="2331720"/>
-            <a:ext cx="9418320" cy="1554480"/>
+            <a:off x="1295400" y="2608719"/>
+            <a:ext cx="9418320" cy="553998"/>
           </a:xfrm>
           <a:prstGeom prst="rect">
             <a:avLst/>
@@ -7545,24 +7860,72 @@
               </a:defRPr>
             </a:pPr>
             <a:r>
-              <a:t>CẢM ƠN THẦY/CÔ</a:t>
-            </a:r>
-          </a:p>
-          <a:p>
-            <a:pPr algn="ctr">
-              <a:spcAft>
-                <a:spcPts val="800"/>
-              </a:spcAft>
-              <a:defRPr sz="5200" b="1">
-                <a:solidFill>
-                  <a:srgbClr val="FFFFFF"/>
-                </a:solidFill>
-                <a:latin typeface="Segoe UI"/>
-              </a:defRPr>
-            </a:pPr>
-            <a:r>
-              <a:t>Q &amp; A</a:t>
-            </a:r>
+              <a:rPr lang="en-US" sz="3000" dirty="0" err="1">
+                <a:latin typeface="Arial" panose="020B0604020202020204" pitchFamily="34" charset="0"/>
+                <a:cs typeface="Arial" panose="020B0604020202020204" pitchFamily="34" charset="0"/>
+              </a:rPr>
+              <a:t>Cảm</a:t>
+            </a:r>
+            <a:r>
+              <a:rPr lang="en-US" sz="3000" dirty="0">
+                <a:latin typeface="Arial" panose="020B0604020202020204" pitchFamily="34" charset="0"/>
+                <a:cs typeface="Arial" panose="020B0604020202020204" pitchFamily="34" charset="0"/>
+              </a:rPr>
+              <a:t> </a:t>
+            </a:r>
+            <a:r>
+              <a:rPr lang="en-US" sz="3000" dirty="0" err="1">
+                <a:latin typeface="Arial" panose="020B0604020202020204" pitchFamily="34" charset="0"/>
+                <a:cs typeface="Arial" panose="020B0604020202020204" pitchFamily="34" charset="0"/>
+              </a:rPr>
+              <a:t>ơn</a:t>
+            </a:r>
+            <a:r>
+              <a:rPr lang="en-US" sz="3000" dirty="0">
+                <a:latin typeface="Arial" panose="020B0604020202020204" pitchFamily="34" charset="0"/>
+                <a:cs typeface="Arial" panose="020B0604020202020204" pitchFamily="34" charset="0"/>
+              </a:rPr>
+              <a:t> </a:t>
+            </a:r>
+            <a:r>
+              <a:rPr lang="en-US" sz="3000" dirty="0" err="1">
+                <a:latin typeface="Arial" panose="020B0604020202020204" pitchFamily="34" charset="0"/>
+                <a:cs typeface="Arial" panose="020B0604020202020204" pitchFamily="34" charset="0"/>
+              </a:rPr>
+              <a:t>đã</a:t>
+            </a:r>
+            <a:r>
+              <a:rPr lang="en-US" sz="3000" dirty="0">
+                <a:latin typeface="Arial" panose="020B0604020202020204" pitchFamily="34" charset="0"/>
+                <a:cs typeface="Arial" panose="020B0604020202020204" pitchFamily="34" charset="0"/>
+              </a:rPr>
+              <a:t> </a:t>
+            </a:r>
+            <a:r>
+              <a:rPr lang="en-US" sz="3000" dirty="0" err="1">
+                <a:latin typeface="Arial" panose="020B0604020202020204" pitchFamily="34" charset="0"/>
+                <a:cs typeface="Arial" panose="020B0604020202020204" pitchFamily="34" charset="0"/>
+              </a:rPr>
+              <a:t>lắng</a:t>
+            </a:r>
+            <a:r>
+              <a:rPr lang="en-US" sz="3000" dirty="0">
+                <a:latin typeface="Arial" panose="020B0604020202020204" pitchFamily="34" charset="0"/>
+                <a:cs typeface="Arial" panose="020B0604020202020204" pitchFamily="34" charset="0"/>
+              </a:rPr>
+              <a:t> </a:t>
+            </a:r>
+            <a:r>
+              <a:rPr lang="en-US" sz="3000" dirty="0" err="1">
+                <a:latin typeface="Arial" panose="020B0604020202020204" pitchFamily="34" charset="0"/>
+                <a:cs typeface="Arial" panose="020B0604020202020204" pitchFamily="34" charset="0"/>
+              </a:rPr>
+              <a:t>nghe</a:t>
+            </a:r>
+            <a:endParaRPr sz="3000" dirty="0">
+              <a:latin typeface="Arial" panose="020B0604020202020204" pitchFamily="34" charset="0"/>
+              <a:cs typeface="Arial" panose="020B0604020202020204" pitchFamily="34" charset="0"/>
+            </a:endParaRPr>
           </a:p>
         </p:txBody>
       </p:sp>
@@ -7605,7 +7968,9 @@
         <p:txBody>
           <a:bodyPr rtlCol="0" anchor="ctr"/>
           <a:lstStyle/>
-          <a:p/>
+          <a:p>
+            <a:endParaRPr/>
+          </a:p>
         </p:txBody>
       </p:sp>
       <p:sp>
@@ -7642,7 +8007,20 @@
               </a:defRPr>
             </a:pPr>
             <a:r>
-              <a:t>Chạy lại pipeline:  python src/run_all.py</a:t>
+              <a:rPr dirty="0" err="1"/>
+              <a:t>Chạy</a:t>
+            </a:r>
+            <a:r>
+              <a:rPr dirty="0"/>
+              <a:t> </a:t>
+            </a:r>
+            <a:r>
+              <a:rPr dirty="0" err="1"/>
+              <a:t>lại</a:t>
+            </a:r>
+            <a:r>
+              <a:rPr dirty="0"/>
+              <a:t> pipeline:  python src/run_all.py</a:t>
             </a:r>
           </a:p>
           <a:p>
@@ -7658,7 +8036,32 @@
               </a:defRPr>
             </a:pPr>
             <a:r>
-              <a:t>Demo hệ thống:  python -m streamlit run src/app_dashboard.py</a:t>
+              <a:rPr dirty="0"/>
+              <a:t>Demo </a:t>
+            </a:r>
+            <a:r>
+              <a:rPr dirty="0" err="1"/>
+              <a:t>hệ</a:t>
+            </a:r>
+            <a:r>
+              <a:rPr dirty="0"/>
+              <a:t> </a:t>
+            </a:r>
+            <a:r>
+              <a:rPr dirty="0" err="1"/>
+              <a:t>thống</a:t>
+            </a:r>
+            <a:r>
+              <a:rPr dirty="0"/>
+              <a:t>:  python -m </a:t>
+            </a:r>
+            <a:r>
+              <a:rPr dirty="0" err="1"/>
+              <a:t>streamlit</a:t>
+            </a:r>
+            <a:r>
+              <a:rPr dirty="0"/>
+              <a:t> run src/app_dashboard.py</a:t>
             </a:r>
           </a:p>
         </p:txBody>
@@ -7672,7 +8075,7 @@
 </file>
 
 <file path=ppt/slides/slide2.xml><?xml version="1.0" encoding="utf-8"?>
-<p:sld xmlns:a="http://schemas.openxmlformats.org/drawingml/2006/main" xmlns:p="http://schemas.openxmlformats.org/presentationml/2006/main" xmlns:r="http://schemas.openxmlformats.org/officeDocument/2006/relationships">
+<p:sld xmlns:a="http://schemas.openxmlformats.org/drawingml/2006/main" xmlns:r="http://schemas.openxmlformats.org/officeDocument/2006/relationships" xmlns:p="http://schemas.openxmlformats.org/presentationml/2006/main">
   <p:cSld>
     <p:spTree>
       <p:nvGrpSpPr>
@@ -7680,7 +8083,14 @@
         <p:cNvGrpSpPr/>
         <p:nvPr/>
       </p:nvGrpSpPr>
-      <p:grpSpPr/>
+      <p:grpSpPr>
+        <a:xfrm>
+          <a:off x="0" y="0"/>
+          <a:ext cx="0" cy="0"/>
+          <a:chOff x="0" y="0"/>
+          <a:chExt cx="0" cy="0"/>
+        </a:xfrm>
+      </p:grpSpPr>
       <p:sp>
         <p:nvSpPr>
           <p:cNvPr id="2" name="Rectangle 1"/>
@@ -7720,7 +8130,9 @@
         <p:txBody>
           <a:bodyPr rtlCol="0" anchor="ctr"/>
           <a:lstStyle/>
-          <a:p/>
+          <a:p>
+            <a:endParaRPr/>
+          </a:p>
         </p:txBody>
       </p:sp>
       <p:sp>
@@ -7762,7 +8174,9 @@
         <p:txBody>
           <a:bodyPr rtlCol="0" anchor="ctr"/>
           <a:lstStyle/>
-          <a:p/>
+          <a:p>
+            <a:endParaRPr/>
+          </a:p>
         </p:txBody>
       </p:sp>
       <p:sp>
@@ -7859,7 +8273,9 @@
         <p:txBody>
           <a:bodyPr rtlCol="0" anchor="ctr"/>
           <a:lstStyle/>
-          <a:p/>
+          <a:p>
+            <a:endParaRPr/>
+          </a:p>
         </p:txBody>
       </p:sp>
       <p:sp>
@@ -7983,7 +8399,9 @@
         <p:txBody>
           <a:bodyPr rtlCol="0" anchor="ctr"/>
           <a:lstStyle/>
-          <a:p/>
+          <a:p>
+            <a:endParaRPr/>
+          </a:p>
         </p:txBody>
       </p:sp>
       <p:sp>
@@ -8027,7 +8445,9 @@
         <p:txBody>
           <a:bodyPr rtlCol="0" anchor="ctr"/>
           <a:lstStyle/>
-          <a:p/>
+          <a:p>
+            <a:endParaRPr/>
+          </a:p>
         </p:txBody>
       </p:sp>
       <p:sp>
@@ -8151,7 +8571,9 @@
         <p:txBody>
           <a:bodyPr rtlCol="0" anchor="ctr"/>
           <a:lstStyle/>
-          <a:p/>
+          <a:p>
+            <a:endParaRPr/>
+          </a:p>
         </p:txBody>
       </p:sp>
       <p:sp>
@@ -8195,7 +8617,9 @@
         <p:txBody>
           <a:bodyPr rtlCol="0" anchor="ctr"/>
           <a:lstStyle/>
-          <a:p/>
+          <a:p>
+            <a:endParaRPr/>
+          </a:p>
         </p:txBody>
       </p:sp>
       <p:sp>
@@ -8319,7 +8743,9 @@
         <p:txBody>
           <a:bodyPr rtlCol="0" anchor="ctr"/>
           <a:lstStyle/>
-          <a:p/>
+          <a:p>
+            <a:endParaRPr/>
+          </a:p>
         </p:txBody>
       </p:sp>
       <p:sp>
@@ -8363,7 +8789,9 @@
         <p:txBody>
           <a:bodyPr rtlCol="0" anchor="ctr"/>
           <a:lstStyle/>
-          <a:p/>
+          <a:p>
+            <a:endParaRPr/>
+          </a:p>
         </p:txBody>
       </p:sp>
       <p:sp>
@@ -8487,7 +8915,9 @@
         <p:txBody>
           <a:bodyPr rtlCol="0" anchor="ctr"/>
           <a:lstStyle/>
-          <a:p/>
+          <a:p>
+            <a:endParaRPr/>
+          </a:p>
         </p:txBody>
       </p:sp>
       <p:sp>
@@ -8531,7 +8961,9 @@
         <p:txBody>
           <a:bodyPr rtlCol="0" anchor="ctr"/>
           <a:lstStyle/>
-          <a:p/>
+          <a:p>
+            <a:endParaRPr/>
+          </a:p>
         </p:txBody>
       </p:sp>
       <p:sp>
@@ -8655,7 +9087,9 @@
         <p:txBody>
           <a:bodyPr rtlCol="0" anchor="ctr"/>
           <a:lstStyle/>
-          <a:p/>
+          <a:p>
+            <a:endParaRPr/>
+          </a:p>
         </p:txBody>
       </p:sp>
       <p:sp>
@@ -8699,7 +9133,9 @@
         <p:txBody>
           <a:bodyPr rtlCol="0" anchor="ctr"/>
           <a:lstStyle/>
-          <a:p/>
+          <a:p>
+            <a:endParaRPr/>
+          </a:p>
         </p:txBody>
       </p:sp>
       <p:sp>
@@ -8823,7 +9259,9 @@
         <p:txBody>
           <a:bodyPr rtlCol="0" anchor="ctr"/>
           <a:lstStyle/>
-          <a:p/>
+          <a:p>
+            <a:endParaRPr/>
+          </a:p>
         </p:txBody>
       </p:sp>
       <p:sp>
@@ -8867,7 +9305,9 @@
         <p:txBody>
           <a:bodyPr rtlCol="0" anchor="ctr"/>
           <a:lstStyle/>
-          <a:p/>
+          <a:p>
+            <a:endParaRPr/>
+          </a:p>
         </p:txBody>
       </p:sp>
       <p:sp>
@@ -8957,7 +9397,7 @@
 </file>
 
 <file path=ppt/slides/slide3.xml><?xml version="1.0" encoding="utf-8"?>
-<p:sld xmlns:a="http://schemas.openxmlformats.org/drawingml/2006/main" xmlns:p="http://schemas.openxmlformats.org/presentationml/2006/main" xmlns:r="http://schemas.openxmlformats.org/officeDocument/2006/relationships">
+<p:sld xmlns:a="http://schemas.openxmlformats.org/drawingml/2006/main" xmlns:r="http://schemas.openxmlformats.org/officeDocument/2006/relationships" xmlns:p="http://schemas.openxmlformats.org/presentationml/2006/main">
   <p:cSld>
     <p:spTree>
       <p:nvGrpSpPr>
@@ -8965,7 +9405,14 @@
         <p:cNvGrpSpPr/>
         <p:nvPr/>
       </p:nvGrpSpPr>
-      <p:grpSpPr/>
+      <p:grpSpPr>
+        <a:xfrm>
+          <a:off x="0" y="0"/>
+          <a:ext cx="0" cy="0"/>
+          <a:chOff x="0" y="0"/>
+          <a:chExt cx="0" cy="0"/>
+        </a:xfrm>
+      </p:grpSpPr>
       <p:sp>
         <p:nvSpPr>
           <p:cNvPr id="2" name="Rectangle 1"/>
@@ -9005,7 +9452,9 @@
         <p:txBody>
           <a:bodyPr rtlCol="0" anchor="ctr"/>
           <a:lstStyle/>
-          <a:p/>
+          <a:p>
+            <a:endParaRPr/>
+          </a:p>
         </p:txBody>
       </p:sp>
       <p:sp>
@@ -9047,7 +9496,9 @@
         <p:txBody>
           <a:bodyPr rtlCol="0" anchor="ctr"/>
           <a:lstStyle/>
-          <a:p/>
+          <a:p>
+            <a:endParaRPr/>
+          </a:p>
         </p:txBody>
       </p:sp>
       <p:sp>
@@ -9144,7 +9595,9 @@
         <p:txBody>
           <a:bodyPr rtlCol="0" anchor="ctr"/>
           <a:lstStyle/>
-          <a:p/>
+          <a:p>
+            <a:endParaRPr/>
+          </a:p>
         </p:txBody>
       </p:sp>
       <p:sp>
@@ -9268,7 +9721,9 @@
         <p:txBody>
           <a:bodyPr rtlCol="0" anchor="ctr"/>
           <a:lstStyle/>
-          <a:p/>
+          <a:p>
+            <a:endParaRPr/>
+          </a:p>
         </p:txBody>
       </p:sp>
       <p:sp>
@@ -9349,7 +9804,9 @@
         <p:txBody>
           <a:bodyPr rtlCol="0" anchor="ctr"/>
           <a:lstStyle/>
-          <a:p/>
+          <a:p>
+            <a:endParaRPr/>
+          </a:p>
         </p:txBody>
       </p:sp>
       <p:sp>
@@ -9433,7 +9890,9 @@
         <p:txBody>
           <a:bodyPr rtlCol="0" anchor="ctr"/>
           <a:lstStyle/>
-          <a:p/>
+          <a:p>
+            <a:endParaRPr/>
+          </a:p>
         </p:txBody>
       </p:sp>
       <p:sp>
@@ -9517,7 +9976,9 @@
         <p:txBody>
           <a:bodyPr rtlCol="0" anchor="ctr"/>
           <a:lstStyle/>
-          <a:p/>
+          <a:p>
+            <a:endParaRPr/>
+          </a:p>
         </p:txBody>
       </p:sp>
       <p:sp>
@@ -9601,7 +10062,9 @@
         <p:txBody>
           <a:bodyPr rtlCol="0" anchor="ctr"/>
           <a:lstStyle/>
-          <a:p/>
+          <a:p>
+            <a:endParaRPr/>
+          </a:p>
         </p:txBody>
       </p:sp>
       <p:sp>
@@ -9685,7 +10148,9 @@
         <p:txBody>
           <a:bodyPr rtlCol="0" anchor="ctr"/>
           <a:lstStyle/>
-          <a:p/>
+          <a:p>
+            <a:endParaRPr/>
+          </a:p>
         </p:txBody>
       </p:sp>
       <p:sp>
@@ -9769,7 +10234,9 @@
         <p:txBody>
           <a:bodyPr rtlCol="0" anchor="ctr"/>
           <a:lstStyle/>
-          <a:p/>
+          <a:p>
+            <a:endParaRPr/>
+          </a:p>
         </p:txBody>
       </p:sp>
       <p:sp>
@@ -9857,7 +10324,9 @@
         <p:txBody>
           <a:bodyPr rtlCol="0" anchor="ctr"/>
           <a:lstStyle/>
-          <a:p/>
+          <a:p>
+            <a:endParaRPr/>
+          </a:p>
         </p:txBody>
       </p:sp>
       <p:sp>
@@ -9938,7 +10407,9 @@
         <p:txBody>
           <a:bodyPr rtlCol="0" anchor="ctr"/>
           <a:lstStyle/>
-          <a:p/>
+          <a:p>
+            <a:endParaRPr/>
+          </a:p>
         </p:txBody>
       </p:sp>
       <p:sp>
@@ -10061,7 +10532,9 @@
         <p:txBody>
           <a:bodyPr rtlCol="0" anchor="ctr"/>
           <a:lstStyle/>
-          <a:p/>
+          <a:p>
+            <a:endParaRPr/>
+          </a:p>
         </p:txBody>
       </p:sp>
       <p:sp>
@@ -10184,7 +10657,9 @@
         <p:txBody>
           <a:bodyPr rtlCol="0" anchor="ctr"/>
           <a:lstStyle/>
-          <a:p/>
+          <a:p>
+            <a:endParaRPr/>
+          </a:p>
         </p:txBody>
       </p:sp>
       <p:sp>
@@ -10307,7 +10782,9 @@
         <p:txBody>
           <a:bodyPr rtlCol="0" anchor="ctr"/>
           <a:lstStyle/>
-          <a:p/>
+          <a:p>
+            <a:endParaRPr/>
+          </a:p>
         </p:txBody>
       </p:sp>
       <p:sp>
@@ -10430,7 +10907,9 @@
         <p:txBody>
           <a:bodyPr rtlCol="0" anchor="ctr"/>
           <a:lstStyle/>
-          <a:p/>
+          <a:p>
+            <a:endParaRPr/>
+          </a:p>
         </p:txBody>
       </p:sp>
       <p:sp>
@@ -10553,7 +11032,9 @@
         <p:txBody>
           <a:bodyPr rtlCol="0" anchor="ctr"/>
           <a:lstStyle/>
-          <a:p/>
+          <a:p>
+            <a:endParaRPr/>
+          </a:p>
         </p:txBody>
       </p:sp>
       <p:sp>
@@ -10646,7 +11127,7 @@
 </file>
 
 <file path=ppt/slides/slide4.xml><?xml version="1.0" encoding="utf-8"?>
-<p:sld xmlns:a="http://schemas.openxmlformats.org/drawingml/2006/main" xmlns:p="http://schemas.openxmlformats.org/presentationml/2006/main" xmlns:r="http://schemas.openxmlformats.org/officeDocument/2006/relationships">
+<p:sld xmlns:a="http://schemas.openxmlformats.org/drawingml/2006/main" xmlns:r="http://schemas.openxmlformats.org/officeDocument/2006/relationships" xmlns:p="http://schemas.openxmlformats.org/presentationml/2006/main">
   <p:cSld>
     <p:spTree>
       <p:nvGrpSpPr>
@@ -10654,7 +11135,14 @@
         <p:cNvGrpSpPr/>
         <p:nvPr/>
       </p:nvGrpSpPr>
-      <p:grpSpPr/>
+      <p:grpSpPr>
+        <a:xfrm>
+          <a:off x="0" y="0"/>
+          <a:ext cx="0" cy="0"/>
+          <a:chOff x="0" y="0"/>
+          <a:chExt cx="0" cy="0"/>
+        </a:xfrm>
+      </p:grpSpPr>
       <p:sp>
         <p:nvSpPr>
           <p:cNvPr id="2" name="Rectangle 1"/>
@@ -10694,7 +11182,9 @@
         <p:txBody>
           <a:bodyPr rtlCol="0" anchor="ctr"/>
           <a:lstStyle/>
-          <a:p/>
+          <a:p>
+            <a:endParaRPr/>
+          </a:p>
         </p:txBody>
       </p:sp>
       <p:sp>
@@ -10736,7 +11226,9 @@
         <p:txBody>
           <a:bodyPr rtlCol="0" anchor="ctr"/>
           <a:lstStyle/>
-          <a:p/>
+          <a:p>
+            <a:endParaRPr/>
+          </a:p>
         </p:txBody>
       </p:sp>
       <p:sp>
@@ -10833,7 +11325,9 @@
         <p:txBody>
           <a:bodyPr rtlCol="0" anchor="ctr"/>
           <a:lstStyle/>
-          <a:p/>
+          <a:p>
+            <a:endParaRPr/>
+          </a:p>
         </p:txBody>
       </p:sp>
       <p:sp>
@@ -10957,7 +11451,9 @@
         <p:txBody>
           <a:bodyPr rtlCol="0" anchor="ctr"/>
           <a:lstStyle/>
-          <a:p/>
+          <a:p>
+            <a:endParaRPr/>
+          </a:p>
         </p:txBody>
       </p:sp>
       <p:sp>
@@ -10999,7 +11495,9 @@
         <p:txBody>
           <a:bodyPr rtlCol="0" anchor="ctr"/>
           <a:lstStyle/>
-          <a:p/>
+          <a:p>
+            <a:endParaRPr/>
+          </a:p>
         </p:txBody>
       </p:sp>
       <p:sp>
@@ -11100,7 +11598,9 @@
         <p:txBody>
           <a:bodyPr rtlCol="0" anchor="ctr"/>
           <a:lstStyle/>
-          <a:p/>
+          <a:p>
+            <a:endParaRPr/>
+          </a:p>
         </p:txBody>
       </p:sp>
       <p:sp>
@@ -11142,7 +11642,9 @@
         <p:txBody>
           <a:bodyPr rtlCol="0" anchor="ctr"/>
           <a:lstStyle/>
-          <a:p/>
+          <a:p>
+            <a:endParaRPr/>
+          </a:p>
         </p:txBody>
       </p:sp>
       <p:sp>
@@ -11243,7 +11745,9 @@
         <p:txBody>
           <a:bodyPr rtlCol="0" anchor="ctr"/>
           <a:lstStyle/>
-          <a:p/>
+          <a:p>
+            <a:endParaRPr/>
+          </a:p>
         </p:txBody>
       </p:sp>
       <p:sp>
@@ -11285,7 +11789,9 @@
         <p:txBody>
           <a:bodyPr rtlCol="0" anchor="ctr"/>
           <a:lstStyle/>
-          <a:p/>
+          <a:p>
+            <a:endParaRPr/>
+          </a:p>
         </p:txBody>
       </p:sp>
       <p:sp>
@@ -11386,7 +11892,9 @@
         <p:txBody>
           <a:bodyPr rtlCol="0" anchor="ctr"/>
           <a:lstStyle/>
-          <a:p/>
+          <a:p>
+            <a:endParaRPr/>
+          </a:p>
         </p:txBody>
       </p:sp>
       <p:sp>
@@ -11428,7 +11936,9 @@
         <p:txBody>
           <a:bodyPr rtlCol="0" anchor="ctr"/>
           <a:lstStyle/>
-          <a:p/>
+          <a:p>
+            <a:endParaRPr/>
+          </a:p>
         </p:txBody>
       </p:sp>
       <p:sp>
@@ -11529,7 +12039,9 @@
         <p:txBody>
           <a:bodyPr rtlCol="0" anchor="ctr"/>
           <a:lstStyle/>
-          <a:p/>
+          <a:p>
+            <a:endParaRPr/>
+          </a:p>
         </p:txBody>
       </p:sp>
       <p:sp>
@@ -11571,7 +12083,9 @@
         <p:txBody>
           <a:bodyPr rtlCol="0" anchor="ctr"/>
           <a:lstStyle/>
-          <a:p/>
+          <a:p>
+            <a:endParaRPr/>
+          </a:p>
         </p:txBody>
       </p:sp>
       <p:sp>
@@ -11648,14 +12162,32 @@
                 <a:tableStyleId>{5C22544A-7EE6-4342-B048-85BDC9FD1C3A}</a:tableStyleId>
               </a:tblPr>
               <a:tblGrid>
-                <a:gridCol w="2454249"/>
-                <a:gridCol w="1561795"/>
-                <a:gridCol w="1561795"/>
+                <a:gridCol w="2454249">
+                  <a:extLst>
+                    <a:ext uri="{9D8B030D-6E8A-4147-A177-3AD203B41FA5}">
+                      <a16:colId xmlns:a16="http://schemas.microsoft.com/office/drawing/2014/main" val="20000"/>
+                    </a:ext>
+                  </a:extLst>
+                </a:gridCol>
+                <a:gridCol w="1561795">
+                  <a:extLst>
+                    <a:ext uri="{9D8B030D-6E8A-4147-A177-3AD203B41FA5}">
+                      <a16:colId xmlns:a16="http://schemas.microsoft.com/office/drawing/2014/main" val="20001"/>
+                    </a:ext>
+                  </a:extLst>
+                </a:gridCol>
+                <a:gridCol w="1561795">
+                  <a:extLst>
+                    <a:ext uri="{9D8B030D-6E8A-4147-A177-3AD203B41FA5}">
+                      <a16:colId xmlns:a16="http://schemas.microsoft.com/office/drawing/2014/main" val="20002"/>
+                    </a:ext>
+                  </a:extLst>
+                </a:gridCol>
               </a:tblGrid>
               <a:tr h="384048">
                 <a:tc>
                   <a:txBody>
-                    <a:bodyPr wrap="square"/>
+                    <a:bodyPr/>
                     <a:lstStyle/>
                     <a:p>
                       <a:pPr algn="l">
@@ -11682,7 +12214,7 @@
                 </a:tc>
                 <a:tc>
                   <a:txBody>
-                    <a:bodyPr wrap="square"/>
+                    <a:bodyPr/>
                     <a:lstStyle/>
                     <a:p>
                       <a:pPr algn="r">
@@ -11709,7 +12241,7 @@
                 </a:tc>
                 <a:tc>
                   <a:txBody>
-                    <a:bodyPr wrap="square"/>
+                    <a:bodyPr/>
                     <a:lstStyle/>
                     <a:p>
                       <a:pPr algn="r">
@@ -11734,11 +12266,16 @@
                     </a:solidFill>
                   </a:tcPr>
                 </a:tc>
+                <a:extLst>
+                  <a:ext uri="{0D108BD9-81ED-4DB2-BD59-A6C34878D82A}">
+                    <a16:rowId xmlns:a16="http://schemas.microsoft.com/office/drawing/2014/main" val="10000"/>
+                  </a:ext>
+                </a:extLst>
               </a:tr>
               <a:tr h="384048">
                 <a:tc>
                   <a:txBody>
-                    <a:bodyPr wrap="square"/>
+                    <a:bodyPr/>
                     <a:lstStyle/>
                     <a:p>
                       <a:pPr algn="l">
@@ -11765,7 +12302,7 @@
                 </a:tc>
                 <a:tc>
                   <a:txBody>
-                    <a:bodyPr wrap="square"/>
+                    <a:bodyPr/>
                     <a:lstStyle/>
                     <a:p>
                       <a:pPr algn="r">
@@ -11792,7 +12329,7 @@
                 </a:tc>
                 <a:tc>
                   <a:txBody>
-                    <a:bodyPr wrap="square"/>
+                    <a:bodyPr/>
                     <a:lstStyle/>
                     <a:p>
                       <a:pPr algn="r">
@@ -11817,11 +12354,16 @@
                     </a:solidFill>
                   </a:tcPr>
                 </a:tc>
+                <a:extLst>
+                  <a:ext uri="{0D108BD9-81ED-4DB2-BD59-A6C34878D82A}">
+                    <a16:rowId xmlns:a16="http://schemas.microsoft.com/office/drawing/2014/main" val="10001"/>
+                  </a:ext>
+                </a:extLst>
               </a:tr>
               <a:tr h="384048">
                 <a:tc>
                   <a:txBody>
-                    <a:bodyPr wrap="square"/>
+                    <a:bodyPr/>
                     <a:lstStyle/>
                     <a:p>
                       <a:pPr algn="l">
@@ -11848,7 +12390,7 @@
                 </a:tc>
                 <a:tc>
                   <a:txBody>
-                    <a:bodyPr wrap="square"/>
+                    <a:bodyPr/>
                     <a:lstStyle/>
                     <a:p>
                       <a:pPr algn="r">
@@ -11875,7 +12417,7 @@
                 </a:tc>
                 <a:tc>
                   <a:txBody>
-                    <a:bodyPr wrap="square"/>
+                    <a:bodyPr/>
                     <a:lstStyle/>
                     <a:p>
                       <a:pPr algn="r">
@@ -11900,11 +12442,16 @@
                     </a:solidFill>
                   </a:tcPr>
                 </a:tc>
+                <a:extLst>
+                  <a:ext uri="{0D108BD9-81ED-4DB2-BD59-A6C34878D82A}">
+                    <a16:rowId xmlns:a16="http://schemas.microsoft.com/office/drawing/2014/main" val="10002"/>
+                  </a:ext>
+                </a:extLst>
               </a:tr>
               <a:tr h="384048">
                 <a:tc>
                   <a:txBody>
-                    <a:bodyPr wrap="square"/>
+                    <a:bodyPr/>
                     <a:lstStyle/>
                     <a:p>
                       <a:pPr algn="l">
@@ -11931,7 +12478,7 @@
                 </a:tc>
                 <a:tc>
                   <a:txBody>
-                    <a:bodyPr wrap="square"/>
+                    <a:bodyPr/>
                     <a:lstStyle/>
                     <a:p>
                       <a:pPr algn="r">
@@ -11958,7 +12505,7 @@
                 </a:tc>
                 <a:tc>
                   <a:txBody>
-                    <a:bodyPr wrap="square"/>
+                    <a:bodyPr/>
                     <a:lstStyle/>
                     <a:p>
                       <a:pPr algn="r">
@@ -11983,11 +12530,16 @@
                     </a:solidFill>
                   </a:tcPr>
                 </a:tc>
+                <a:extLst>
+                  <a:ext uri="{0D108BD9-81ED-4DB2-BD59-A6C34878D82A}">
+                    <a16:rowId xmlns:a16="http://schemas.microsoft.com/office/drawing/2014/main" val="10003"/>
+                  </a:ext>
+                </a:extLst>
               </a:tr>
               <a:tr h="384048">
                 <a:tc>
                   <a:txBody>
-                    <a:bodyPr wrap="square"/>
+                    <a:bodyPr/>
                     <a:lstStyle/>
                     <a:p>
                       <a:pPr algn="l">
@@ -12014,7 +12566,7 @@
                 </a:tc>
                 <a:tc>
                   <a:txBody>
-                    <a:bodyPr wrap="square"/>
+                    <a:bodyPr/>
                     <a:lstStyle/>
                     <a:p>
                       <a:pPr algn="r">
@@ -12041,7 +12593,7 @@
                 </a:tc>
                 <a:tc>
                   <a:txBody>
-                    <a:bodyPr wrap="square"/>
+                    <a:bodyPr/>
                     <a:lstStyle/>
                     <a:p>
                       <a:pPr algn="r">
@@ -12066,6 +12618,11 @@
                     </a:solidFill>
                   </a:tcPr>
                 </a:tc>
+                <a:extLst>
+                  <a:ext uri="{0D108BD9-81ED-4DB2-BD59-A6C34878D82A}">
+                    <a16:rowId xmlns:a16="http://schemas.microsoft.com/office/drawing/2014/main" val="10004"/>
+                  </a:ext>
+                </a:extLst>
               </a:tr>
             </a:tbl>
           </a:graphicData>
@@ -12114,7 +12671,9 @@
         <p:txBody>
           <a:bodyPr rtlCol="0" anchor="ctr"/>
           <a:lstStyle/>
-          <a:p/>
+          <a:p>
+            <a:endParaRPr/>
+          </a:p>
         </p:txBody>
       </p:sp>
       <p:sp>
@@ -12195,7 +12754,9 @@
         <p:txBody>
           <a:bodyPr rtlCol="0" anchor="ctr"/>
           <a:lstStyle/>
-          <a:p/>
+          <a:p>
+            <a:endParaRPr/>
+          </a:p>
         </p:txBody>
       </p:sp>
       <p:sp>
@@ -12279,7 +12840,9 @@
         <p:txBody>
           <a:bodyPr rtlCol="0" anchor="ctr"/>
           <a:lstStyle/>
-          <a:p/>
+          <a:p>
+            <a:endParaRPr/>
+          </a:p>
         </p:txBody>
       </p:sp>
       <p:sp>
@@ -12363,7 +12926,9 @@
         <p:txBody>
           <a:bodyPr rtlCol="0" anchor="ctr"/>
           <a:lstStyle/>
-          <a:p/>
+          <a:p>
+            <a:endParaRPr/>
+          </a:p>
         </p:txBody>
       </p:sp>
       <p:sp>
@@ -12447,7 +13012,9 @@
         <p:txBody>
           <a:bodyPr rtlCol="0" anchor="ctr"/>
           <a:lstStyle/>
-          <a:p/>
+          <a:p>
+            <a:endParaRPr/>
+          </a:p>
         </p:txBody>
       </p:sp>
       <p:sp>
@@ -12531,7 +13098,9 @@
         <p:txBody>
           <a:bodyPr rtlCol="0" anchor="ctr"/>
           <a:lstStyle/>
-          <a:p/>
+          <a:p>
+            <a:endParaRPr/>
+          </a:p>
         </p:txBody>
       </p:sp>
       <p:sp>
@@ -12585,7 +13154,7 @@
 </file>
 
 <file path=ppt/slides/slide5.xml><?xml version="1.0" encoding="utf-8"?>
-<p:sld xmlns:a="http://schemas.openxmlformats.org/drawingml/2006/main" xmlns:p="http://schemas.openxmlformats.org/presentationml/2006/main" xmlns:r="http://schemas.openxmlformats.org/officeDocument/2006/relationships">
+<p:sld xmlns:a="http://schemas.openxmlformats.org/drawingml/2006/main" xmlns:r="http://schemas.openxmlformats.org/officeDocument/2006/relationships" xmlns:p="http://schemas.openxmlformats.org/presentationml/2006/main">
   <p:cSld>
     <p:spTree>
       <p:nvGrpSpPr>
@@ -12593,7 +13162,14 @@
         <p:cNvGrpSpPr/>
         <p:nvPr/>
       </p:nvGrpSpPr>
-      <p:grpSpPr/>
+      <p:grpSpPr>
+        <a:xfrm>
+          <a:off x="0" y="0"/>
+          <a:ext cx="0" cy="0"/>
+          <a:chOff x="0" y="0"/>
+          <a:chExt cx="0" cy="0"/>
+        </a:xfrm>
+      </p:grpSpPr>
       <p:sp>
         <p:nvSpPr>
           <p:cNvPr id="2" name="Rectangle 1"/>
@@ -12633,7 +13209,9 @@
         <p:txBody>
           <a:bodyPr rtlCol="0" anchor="ctr"/>
           <a:lstStyle/>
-          <a:p/>
+          <a:p>
+            <a:endParaRPr/>
+          </a:p>
         </p:txBody>
       </p:sp>
       <p:sp>
@@ -12675,7 +13253,9 @@
         <p:txBody>
           <a:bodyPr rtlCol="0" anchor="ctr"/>
           <a:lstStyle/>
-          <a:p/>
+          <a:p>
+            <a:endParaRPr/>
+          </a:p>
         </p:txBody>
       </p:sp>
       <p:sp>
@@ -12772,7 +13352,9 @@
         <p:txBody>
           <a:bodyPr rtlCol="0" anchor="ctr"/>
           <a:lstStyle/>
-          <a:p/>
+          <a:p>
+            <a:endParaRPr/>
+          </a:p>
         </p:txBody>
       </p:sp>
       <p:sp>
@@ -12896,7 +13478,9 @@
         <p:txBody>
           <a:bodyPr rtlCol="0" anchor="ctr"/>
           <a:lstStyle/>
-          <a:p/>
+          <a:p>
+            <a:endParaRPr/>
+          </a:p>
         </p:txBody>
       </p:sp>
       <p:sp>
@@ -12977,7 +13561,9 @@
         <p:txBody>
           <a:bodyPr rtlCol="0" anchor="ctr"/>
           <a:lstStyle/>
-          <a:p/>
+          <a:p>
+            <a:endParaRPr/>
+          </a:p>
         </p:txBody>
       </p:sp>
       <p:sp>
@@ -13023,7 +13609,9 @@
         <p:txBody>
           <a:bodyPr rtlCol="0" anchor="ctr"/>
           <a:lstStyle/>
-          <a:p/>
+          <a:p>
+            <a:endParaRPr/>
+          </a:p>
         </p:txBody>
       </p:sp>
       <p:sp>
@@ -13104,7 +13692,9 @@
         <p:txBody>
           <a:bodyPr rtlCol="0" anchor="ctr"/>
           <a:lstStyle/>
-          <a:p/>
+          <a:p>
+            <a:endParaRPr/>
+          </a:p>
         </p:txBody>
       </p:sp>
       <p:sp>
@@ -13150,7 +13740,9 @@
         <p:txBody>
           <a:bodyPr rtlCol="0" anchor="ctr"/>
           <a:lstStyle/>
-          <a:p/>
+          <a:p>
+            <a:endParaRPr/>
+          </a:p>
         </p:txBody>
       </p:sp>
       <p:sp>
@@ -13231,7 +13823,9 @@
         <p:txBody>
           <a:bodyPr rtlCol="0" anchor="ctr"/>
           <a:lstStyle/>
-          <a:p/>
+          <a:p>
+            <a:endParaRPr/>
+          </a:p>
         </p:txBody>
       </p:sp>
       <p:sp>
@@ -13277,7 +13871,9 @@
         <p:txBody>
           <a:bodyPr rtlCol="0" anchor="ctr"/>
           <a:lstStyle/>
-          <a:p/>
+          <a:p>
+            <a:endParaRPr/>
+          </a:p>
         </p:txBody>
       </p:sp>
       <p:sp>
@@ -13358,7 +13954,9 @@
         <p:txBody>
           <a:bodyPr rtlCol="0" anchor="ctr"/>
           <a:lstStyle/>
-          <a:p/>
+          <a:p>
+            <a:endParaRPr/>
+          </a:p>
         </p:txBody>
       </p:sp>
       <p:sp>
@@ -13404,7 +14002,9 @@
         <p:txBody>
           <a:bodyPr rtlCol="0" anchor="ctr"/>
           <a:lstStyle/>
-          <a:p/>
+          <a:p>
+            <a:endParaRPr/>
+          </a:p>
         </p:txBody>
       </p:sp>
       <p:sp>
@@ -13485,7 +14085,9 @@
         <p:txBody>
           <a:bodyPr rtlCol="0" anchor="ctr"/>
           <a:lstStyle/>
-          <a:p/>
+          <a:p>
+            <a:endParaRPr/>
+          </a:p>
         </p:txBody>
       </p:sp>
       <p:sp>
@@ -13531,7 +14133,9 @@
         <p:txBody>
           <a:bodyPr rtlCol="0" anchor="ctr"/>
           <a:lstStyle/>
-          <a:p/>
+          <a:p>
+            <a:endParaRPr/>
+          </a:p>
         </p:txBody>
       </p:sp>
       <p:sp>
@@ -13616,7 +14220,9 @@
         <p:txBody>
           <a:bodyPr rtlCol="0" anchor="ctr"/>
           <a:lstStyle/>
-          <a:p/>
+          <a:p>
+            <a:endParaRPr/>
+          </a:p>
         </p:txBody>
       </p:sp>
       <p:sp>
@@ -13697,7 +14303,9 @@
         <p:txBody>
           <a:bodyPr rtlCol="0" anchor="ctr"/>
           <a:lstStyle/>
-          <a:p/>
+          <a:p>
+            <a:endParaRPr/>
+          </a:p>
         </p:txBody>
       </p:sp>
       <p:sp>
@@ -13781,7 +14389,9 @@
         <p:txBody>
           <a:bodyPr rtlCol="0" anchor="ctr"/>
           <a:lstStyle/>
-          <a:p/>
+          <a:p>
+            <a:endParaRPr/>
+          </a:p>
         </p:txBody>
       </p:sp>
       <p:sp>
@@ -13865,7 +14475,9 @@
         <p:txBody>
           <a:bodyPr rtlCol="0" anchor="ctr"/>
           <a:lstStyle/>
-          <a:p/>
+          <a:p>
+            <a:endParaRPr/>
+          </a:p>
         </p:txBody>
       </p:sp>
       <p:sp>
@@ -13949,7 +14561,9 @@
         <p:txBody>
           <a:bodyPr rtlCol="0" anchor="ctr"/>
           <a:lstStyle/>
-          <a:p/>
+          <a:p>
+            <a:endParaRPr/>
+          </a:p>
         </p:txBody>
       </p:sp>
       <p:sp>
@@ -14037,7 +14651,9 @@
         <p:txBody>
           <a:bodyPr rtlCol="0" anchor="ctr"/>
           <a:lstStyle/>
-          <a:p/>
+          <a:p>
+            <a:endParaRPr/>
+          </a:p>
         </p:txBody>
       </p:sp>
       <p:sp>
@@ -14118,7 +14734,9 @@
         <p:txBody>
           <a:bodyPr rtlCol="0" anchor="ctr"/>
           <a:lstStyle/>
-          <a:p/>
+          <a:p>
+            <a:endParaRPr/>
+          </a:p>
         </p:txBody>
       </p:sp>
       <p:sp>
@@ -14202,7 +14820,9 @@
         <p:txBody>
           <a:bodyPr rtlCol="0" anchor="ctr"/>
           <a:lstStyle/>
-          <a:p/>
+          <a:p>
+            <a:endParaRPr/>
+          </a:p>
         </p:txBody>
       </p:sp>
       <p:sp>
@@ -14286,7 +14906,9 @@
         <p:txBody>
           <a:bodyPr rtlCol="0" anchor="ctr"/>
           <a:lstStyle/>
-          <a:p/>
+          <a:p>
+            <a:endParaRPr/>
+          </a:p>
         </p:txBody>
       </p:sp>
       <p:sp>
@@ -14370,7 +14992,9 @@
         <p:txBody>
           <a:bodyPr rtlCol="0" anchor="ctr"/>
           <a:lstStyle/>
-          <a:p/>
+          <a:p>
+            <a:endParaRPr/>
+          </a:p>
         </p:txBody>
       </p:sp>
       <p:sp>
@@ -14454,7 +15078,9 @@
         <p:txBody>
           <a:bodyPr rtlCol="0" anchor="ctr"/>
           <a:lstStyle/>
-          <a:p/>
+          <a:p>
+            <a:endParaRPr/>
+          </a:p>
         </p:txBody>
       </p:sp>
       <p:sp>
@@ -14508,7 +15134,7 @@
 </file>
 
 <file path=ppt/slides/slide6.xml><?xml version="1.0" encoding="utf-8"?>
-<p:sld xmlns:a="http://schemas.openxmlformats.org/drawingml/2006/main" xmlns:p="http://schemas.openxmlformats.org/presentationml/2006/main" xmlns:r="http://schemas.openxmlformats.org/officeDocument/2006/relationships">
+<p:sld xmlns:a="http://schemas.openxmlformats.org/drawingml/2006/main" xmlns:r="http://schemas.openxmlformats.org/officeDocument/2006/relationships" xmlns:p="http://schemas.openxmlformats.org/presentationml/2006/main">
   <p:cSld>
     <p:spTree>
       <p:nvGrpSpPr>
@@ -14516,7 +15142,14 @@
         <p:cNvGrpSpPr/>
         <p:nvPr/>
       </p:nvGrpSpPr>
-      <p:grpSpPr/>
+      <p:grpSpPr>
+        <a:xfrm>
+          <a:off x="0" y="0"/>
+          <a:ext cx="0" cy="0"/>
+          <a:chOff x="0" y="0"/>
+          <a:chExt cx="0" cy="0"/>
+        </a:xfrm>
+      </p:grpSpPr>
       <p:sp>
         <p:nvSpPr>
           <p:cNvPr id="2" name="Rectangle 1"/>
@@ -14556,7 +15189,9 @@
         <p:txBody>
           <a:bodyPr rtlCol="0" anchor="ctr"/>
           <a:lstStyle/>
-          <a:p/>
+          <a:p>
+            <a:endParaRPr/>
+          </a:p>
         </p:txBody>
       </p:sp>
       <p:sp>
@@ -14598,7 +15233,9 @@
         <p:txBody>
           <a:bodyPr rtlCol="0" anchor="ctr"/>
           <a:lstStyle/>
-          <a:p/>
+          <a:p>
+            <a:endParaRPr/>
+          </a:p>
         </p:txBody>
       </p:sp>
       <p:sp>
@@ -14695,7 +15332,9 @@
         <p:txBody>
           <a:bodyPr rtlCol="0" anchor="ctr"/>
           <a:lstStyle/>
-          <a:p/>
+          <a:p>
+            <a:endParaRPr/>
+          </a:p>
         </p:txBody>
       </p:sp>
       <p:sp>
@@ -14819,7 +15458,9 @@
         <p:txBody>
           <a:bodyPr rtlCol="0" anchor="ctr"/>
           <a:lstStyle/>
-          <a:p/>
+          <a:p>
+            <a:endParaRPr/>
+          </a:p>
         </p:txBody>
       </p:sp>
       <p:pic>
@@ -14889,7 +15530,9 @@
         <p:txBody>
           <a:bodyPr rtlCol="0" anchor="ctr"/>
           <a:lstStyle/>
-          <a:p/>
+          <a:p>
+            <a:endParaRPr/>
+          </a:p>
         </p:txBody>
       </p:sp>
       <p:pic>
@@ -14959,7 +15602,9 @@
         <p:txBody>
           <a:bodyPr rtlCol="0" anchor="ctr"/>
           <a:lstStyle/>
-          <a:p/>
+          <a:p>
+            <a:endParaRPr/>
+          </a:p>
         </p:txBody>
       </p:sp>
       <p:sp>
@@ -15001,7 +15646,9 @@
         <p:txBody>
           <a:bodyPr rtlCol="0" anchor="ctr"/>
           <a:lstStyle/>
-          <a:p/>
+          <a:p>
+            <a:endParaRPr/>
+          </a:p>
         </p:txBody>
       </p:sp>
       <p:sp>
@@ -15102,7 +15749,9 @@
         <p:txBody>
           <a:bodyPr rtlCol="0" anchor="ctr"/>
           <a:lstStyle/>
-          <a:p/>
+          <a:p>
+            <a:endParaRPr/>
+          </a:p>
         </p:txBody>
       </p:sp>
       <p:sp>
@@ -15144,7 +15793,9 @@
         <p:txBody>
           <a:bodyPr rtlCol="0" anchor="ctr"/>
           <a:lstStyle/>
-          <a:p/>
+          <a:p>
+            <a:endParaRPr/>
+          </a:p>
         </p:txBody>
       </p:sp>
       <p:sp>
@@ -15245,7 +15896,9 @@
         <p:txBody>
           <a:bodyPr rtlCol="0" anchor="ctr"/>
           <a:lstStyle/>
-          <a:p/>
+          <a:p>
+            <a:endParaRPr/>
+          </a:p>
         </p:txBody>
       </p:sp>
       <p:sp>
@@ -15287,7 +15940,9 @@
         <p:txBody>
           <a:bodyPr rtlCol="0" anchor="ctr"/>
           <a:lstStyle/>
-          <a:p/>
+          <a:p>
+            <a:endParaRPr/>
+          </a:p>
         </p:txBody>
       </p:sp>
       <p:sp>
@@ -15354,7 +16009,7 @@
 </file>
 
 <file path=ppt/slides/slide7.xml><?xml version="1.0" encoding="utf-8"?>
-<p:sld xmlns:a="http://schemas.openxmlformats.org/drawingml/2006/main" xmlns:p="http://schemas.openxmlformats.org/presentationml/2006/main" xmlns:r="http://schemas.openxmlformats.org/officeDocument/2006/relationships">
+<p:sld xmlns:a="http://schemas.openxmlformats.org/drawingml/2006/main" xmlns:r="http://schemas.openxmlformats.org/officeDocument/2006/relationships" xmlns:p="http://schemas.openxmlformats.org/presentationml/2006/main">
   <p:cSld>
     <p:spTree>
       <p:nvGrpSpPr>
@@ -15362,7 +16017,14 @@
         <p:cNvGrpSpPr/>
         <p:nvPr/>
       </p:nvGrpSpPr>
-      <p:grpSpPr/>
+      <p:grpSpPr>
+        <a:xfrm>
+          <a:off x="0" y="0"/>
+          <a:ext cx="0" cy="0"/>
+          <a:chOff x="0" y="0"/>
+          <a:chExt cx="0" cy="0"/>
+        </a:xfrm>
+      </p:grpSpPr>
       <p:sp>
         <p:nvSpPr>
           <p:cNvPr id="2" name="Rectangle 1"/>
@@ -15402,7 +16064,9 @@
         <p:txBody>
           <a:bodyPr rtlCol="0" anchor="ctr"/>
           <a:lstStyle/>
-          <a:p/>
+          <a:p>
+            <a:endParaRPr/>
+          </a:p>
         </p:txBody>
       </p:sp>
       <p:sp>
@@ -15444,7 +16108,9 @@
         <p:txBody>
           <a:bodyPr rtlCol="0" anchor="ctr"/>
           <a:lstStyle/>
-          <a:p/>
+          <a:p>
+            <a:endParaRPr/>
+          </a:p>
         </p:txBody>
       </p:sp>
       <p:sp>
@@ -15541,7 +16207,9 @@
         <p:txBody>
           <a:bodyPr rtlCol="0" anchor="ctr"/>
           <a:lstStyle/>
-          <a:p/>
+          <a:p>
+            <a:endParaRPr/>
+          </a:p>
         </p:txBody>
       </p:sp>
       <p:sp>
@@ -15665,7 +16333,9 @@
         <p:txBody>
           <a:bodyPr rtlCol="0" anchor="ctr"/>
           <a:lstStyle/>
-          <a:p/>
+          <a:p>
+            <a:endParaRPr/>
+          </a:p>
         </p:txBody>
       </p:sp>
       <p:pic>
@@ -15735,7 +16405,9 @@
         <p:txBody>
           <a:bodyPr rtlCol="0" anchor="ctr"/>
           <a:lstStyle/>
-          <a:p/>
+          <a:p>
+            <a:endParaRPr/>
+          </a:p>
         </p:txBody>
       </p:sp>
       <p:pic>
@@ -15805,7 +16477,9 @@
         <p:txBody>
           <a:bodyPr rtlCol="0" anchor="ctr"/>
           <a:lstStyle/>
-          <a:p/>
+          <a:p>
+            <a:endParaRPr/>
+          </a:p>
         </p:txBody>
       </p:sp>
       <p:sp>
@@ -15847,7 +16521,9 @@
         <p:txBody>
           <a:bodyPr rtlCol="0" anchor="ctr"/>
           <a:lstStyle/>
-          <a:p/>
+          <a:p>
+            <a:endParaRPr/>
+          </a:p>
         </p:txBody>
       </p:sp>
       <p:sp>
@@ -15948,7 +16624,9 @@
         <p:txBody>
           <a:bodyPr rtlCol="0" anchor="ctr"/>
           <a:lstStyle/>
-          <a:p/>
+          <a:p>
+            <a:endParaRPr/>
+          </a:p>
         </p:txBody>
       </p:sp>
       <p:sp>
@@ -15990,7 +16668,9 @@
         <p:txBody>
           <a:bodyPr rtlCol="0" anchor="ctr"/>
           <a:lstStyle/>
-          <a:p/>
+          <a:p>
+            <a:endParaRPr/>
+          </a:p>
         </p:txBody>
       </p:sp>
       <p:sp>
@@ -16091,7 +16771,9 @@
         <p:txBody>
           <a:bodyPr rtlCol="0" anchor="ctr"/>
           <a:lstStyle/>
-          <a:p/>
+          <a:p>
+            <a:endParaRPr/>
+          </a:p>
         </p:txBody>
       </p:sp>
       <p:sp>
@@ -16133,7 +16815,9 @@
         <p:txBody>
           <a:bodyPr rtlCol="0" anchor="ctr"/>
           <a:lstStyle/>
-          <a:p/>
+          <a:p>
+            <a:endParaRPr/>
+          </a:p>
         </p:txBody>
       </p:sp>
       <p:sp>
@@ -16200,7 +16884,7 @@
 </file>
 
 <file path=ppt/slides/slide8.xml><?xml version="1.0" encoding="utf-8"?>
-<p:sld xmlns:a="http://schemas.openxmlformats.org/drawingml/2006/main" xmlns:p="http://schemas.openxmlformats.org/presentationml/2006/main" xmlns:r="http://schemas.openxmlformats.org/officeDocument/2006/relationships">
+<p:sld xmlns:a="http://schemas.openxmlformats.org/drawingml/2006/main" xmlns:r="http://schemas.openxmlformats.org/officeDocument/2006/relationships" xmlns:p="http://schemas.openxmlformats.org/presentationml/2006/main">
   <p:cSld>
     <p:spTree>
       <p:nvGrpSpPr>
@@ -16208,7 +16892,14 @@
         <p:cNvGrpSpPr/>
         <p:nvPr/>
       </p:nvGrpSpPr>
-      <p:grpSpPr/>
+      <p:grpSpPr>
+        <a:xfrm>
+          <a:off x="0" y="0"/>
+          <a:ext cx="0" cy="0"/>
+          <a:chOff x="0" y="0"/>
+          <a:chExt cx="0" cy="0"/>
+        </a:xfrm>
+      </p:grpSpPr>
       <p:sp>
         <p:nvSpPr>
           <p:cNvPr id="2" name="Rectangle 1"/>
@@ -16248,7 +16939,9 @@
         <p:txBody>
           <a:bodyPr rtlCol="0" anchor="ctr"/>
           <a:lstStyle/>
-          <a:p/>
+          <a:p>
+            <a:endParaRPr/>
+          </a:p>
         </p:txBody>
       </p:sp>
       <p:sp>
@@ -16290,7 +16983,9 @@
         <p:txBody>
           <a:bodyPr rtlCol="0" anchor="ctr"/>
           <a:lstStyle/>
-          <a:p/>
+          <a:p>
+            <a:endParaRPr/>
+          </a:p>
         </p:txBody>
       </p:sp>
       <p:sp>
@@ -16387,7 +17082,9 @@
         <p:txBody>
           <a:bodyPr rtlCol="0" anchor="ctr"/>
           <a:lstStyle/>
-          <a:p/>
+          <a:p>
+            <a:endParaRPr/>
+          </a:p>
         </p:txBody>
       </p:sp>
       <p:sp>
@@ -16487,15 +17184,39 @@
                 <a:tableStyleId>{5C22544A-7EE6-4342-B048-85BDC9FD1C3A}</a:tableStyleId>
               </a:tblPr>
               <a:tblGrid>
-                <a:gridCol w="2977286"/>
-                <a:gridCol w="1263091"/>
-                <a:gridCol w="1263091"/>
-                <a:gridCol w="1263091"/>
+                <a:gridCol w="2977286">
+                  <a:extLst>
+                    <a:ext uri="{9D8B030D-6E8A-4147-A177-3AD203B41FA5}">
+                      <a16:colId xmlns:a16="http://schemas.microsoft.com/office/drawing/2014/main" val="20000"/>
+                    </a:ext>
+                  </a:extLst>
+                </a:gridCol>
+                <a:gridCol w="1263091">
+                  <a:extLst>
+                    <a:ext uri="{9D8B030D-6E8A-4147-A177-3AD203B41FA5}">
+                      <a16:colId xmlns:a16="http://schemas.microsoft.com/office/drawing/2014/main" val="20001"/>
+                    </a:ext>
+                  </a:extLst>
+                </a:gridCol>
+                <a:gridCol w="1263091">
+                  <a:extLst>
+                    <a:ext uri="{9D8B030D-6E8A-4147-A177-3AD203B41FA5}">
+                      <a16:colId xmlns:a16="http://schemas.microsoft.com/office/drawing/2014/main" val="20002"/>
+                    </a:ext>
+                  </a:extLst>
+                </a:gridCol>
+                <a:gridCol w="1263091">
+                  <a:extLst>
+                    <a:ext uri="{9D8B030D-6E8A-4147-A177-3AD203B41FA5}">
+                      <a16:colId xmlns:a16="http://schemas.microsoft.com/office/drawing/2014/main" val="20003"/>
+                    </a:ext>
+                  </a:extLst>
+                </a:gridCol>
               </a:tblGrid>
               <a:tr h="384048">
                 <a:tc>
                   <a:txBody>
-                    <a:bodyPr wrap="square"/>
+                    <a:bodyPr/>
                     <a:lstStyle/>
                     <a:p>
                       <a:pPr algn="l">
@@ -16522,7 +17243,7 @@
                 </a:tc>
                 <a:tc>
                   <a:txBody>
-                    <a:bodyPr wrap="square"/>
+                    <a:bodyPr/>
                     <a:lstStyle/>
                     <a:p>
                       <a:pPr algn="r">
@@ -16549,7 +17270,7 @@
                 </a:tc>
                 <a:tc>
                   <a:txBody>
-                    <a:bodyPr wrap="square"/>
+                    <a:bodyPr/>
                     <a:lstStyle/>
                     <a:p>
                       <a:pPr algn="r">
@@ -16576,7 +17297,7 @@
                 </a:tc>
                 <a:tc>
                   <a:txBody>
-                    <a:bodyPr wrap="square"/>
+                    <a:bodyPr/>
                     <a:lstStyle/>
                     <a:p>
                       <a:pPr algn="r">
@@ -16601,11 +17322,16 @@
                     </a:solidFill>
                   </a:tcPr>
                 </a:tc>
+                <a:extLst>
+                  <a:ext uri="{0D108BD9-81ED-4DB2-BD59-A6C34878D82A}">
+                    <a16:rowId xmlns:a16="http://schemas.microsoft.com/office/drawing/2014/main" val="10000"/>
+                  </a:ext>
+                </a:extLst>
               </a:tr>
               <a:tr h="384048">
                 <a:tc>
                   <a:txBody>
-                    <a:bodyPr wrap="square"/>
+                    <a:bodyPr/>
                     <a:lstStyle/>
                     <a:p>
                       <a:pPr algn="l">
@@ -16632,7 +17358,7 @@
                 </a:tc>
                 <a:tc>
                   <a:txBody>
-                    <a:bodyPr wrap="square"/>
+                    <a:bodyPr/>
                     <a:lstStyle/>
                     <a:p>
                       <a:pPr algn="r">
@@ -16659,7 +17385,7 @@
                 </a:tc>
                 <a:tc>
                   <a:txBody>
-                    <a:bodyPr wrap="square"/>
+                    <a:bodyPr/>
                     <a:lstStyle/>
                     <a:p>
                       <a:pPr algn="r">
@@ -16686,7 +17412,7 @@
                 </a:tc>
                 <a:tc>
                   <a:txBody>
-                    <a:bodyPr wrap="square"/>
+                    <a:bodyPr/>
                     <a:lstStyle/>
                     <a:p>
                       <a:pPr algn="r">
@@ -16711,11 +17437,16 @@
                     </a:solidFill>
                   </a:tcPr>
                 </a:tc>
+                <a:extLst>
+                  <a:ext uri="{0D108BD9-81ED-4DB2-BD59-A6C34878D82A}">
+                    <a16:rowId xmlns:a16="http://schemas.microsoft.com/office/drawing/2014/main" val="10001"/>
+                  </a:ext>
+                </a:extLst>
               </a:tr>
               <a:tr h="384048">
                 <a:tc>
                   <a:txBody>
-                    <a:bodyPr wrap="square"/>
+                    <a:bodyPr/>
                     <a:lstStyle/>
                     <a:p>
                       <a:pPr algn="l">
@@ -16742,7 +17473,7 @@
                 </a:tc>
                 <a:tc>
                   <a:txBody>
-                    <a:bodyPr wrap="square"/>
+                    <a:bodyPr/>
                     <a:lstStyle/>
                     <a:p>
                       <a:pPr algn="r">
@@ -16769,7 +17500,7 @@
                 </a:tc>
                 <a:tc>
                   <a:txBody>
-                    <a:bodyPr wrap="square"/>
+                    <a:bodyPr/>
                     <a:lstStyle/>
                     <a:p>
                       <a:pPr algn="r">
@@ -16796,7 +17527,7 @@
                 </a:tc>
                 <a:tc>
                   <a:txBody>
-                    <a:bodyPr wrap="square"/>
+                    <a:bodyPr/>
                     <a:lstStyle/>
                     <a:p>
                       <a:pPr algn="r">
@@ -16821,11 +17552,16 @@
                     </a:solidFill>
                   </a:tcPr>
                 </a:tc>
+                <a:extLst>
+                  <a:ext uri="{0D108BD9-81ED-4DB2-BD59-A6C34878D82A}">
+                    <a16:rowId xmlns:a16="http://schemas.microsoft.com/office/drawing/2014/main" val="10002"/>
+                  </a:ext>
+                </a:extLst>
               </a:tr>
               <a:tr h="384048">
                 <a:tc>
                   <a:txBody>
-                    <a:bodyPr wrap="square"/>
+                    <a:bodyPr/>
                     <a:lstStyle/>
                     <a:p>
                       <a:pPr algn="l">
@@ -16852,7 +17588,7 @@
                 </a:tc>
                 <a:tc>
                   <a:txBody>
-                    <a:bodyPr wrap="square"/>
+                    <a:bodyPr/>
                     <a:lstStyle/>
                     <a:p>
                       <a:pPr algn="r">
@@ -16879,7 +17615,7 @@
                 </a:tc>
                 <a:tc>
                   <a:txBody>
-                    <a:bodyPr wrap="square"/>
+                    <a:bodyPr/>
                     <a:lstStyle/>
                     <a:p>
                       <a:pPr algn="r">
@@ -16906,7 +17642,7 @@
                 </a:tc>
                 <a:tc>
                   <a:txBody>
-                    <a:bodyPr wrap="square"/>
+                    <a:bodyPr/>
                     <a:lstStyle/>
                     <a:p>
                       <a:pPr algn="r">
@@ -16931,6 +17667,11 @@
                     </a:solidFill>
                   </a:tcPr>
                 </a:tc>
+                <a:extLst>
+                  <a:ext uri="{0D108BD9-81ED-4DB2-BD59-A6C34878D82A}">
+                    <a16:rowId xmlns:a16="http://schemas.microsoft.com/office/drawing/2014/main" val="10003"/>
+                  </a:ext>
+                </a:extLst>
               </a:tr>
             </a:tbl>
           </a:graphicData>
@@ -16979,7 +17720,9 @@
         <p:txBody>
           <a:bodyPr rtlCol="0" anchor="ctr"/>
           <a:lstStyle/>
-          <a:p/>
+          <a:p>
+            <a:endParaRPr/>
+          </a:p>
         </p:txBody>
       </p:sp>
       <p:sp>
@@ -17119,7 +17862,9 @@
         <p:txBody>
           <a:bodyPr rtlCol="0" anchor="ctr"/>
           <a:lstStyle/>
-          <a:p/>
+          <a:p>
+            <a:endParaRPr/>
+          </a:p>
         </p:txBody>
       </p:sp>
       <p:sp>
@@ -17200,7 +17945,9 @@
         <p:txBody>
           <a:bodyPr rtlCol="0" anchor="ctr"/>
           <a:lstStyle/>
-          <a:p/>
+          <a:p>
+            <a:endParaRPr/>
+          </a:p>
         </p:txBody>
       </p:sp>
       <p:sp>
@@ -17284,7 +18031,9 @@
         <p:txBody>
           <a:bodyPr rtlCol="0" anchor="ctr"/>
           <a:lstStyle/>
-          <a:p/>
+          <a:p>
+            <a:endParaRPr/>
+          </a:p>
         </p:txBody>
       </p:sp>
       <p:sp>
@@ -17368,7 +18117,9 @@
         <p:txBody>
           <a:bodyPr rtlCol="0" anchor="ctr"/>
           <a:lstStyle/>
-          <a:p/>
+          <a:p>
+            <a:endParaRPr/>
+          </a:p>
         </p:txBody>
       </p:sp>
       <p:sp>
@@ -17422,7 +18173,7 @@
 </file>
 
 <file path=ppt/slides/slide9.xml><?xml version="1.0" encoding="utf-8"?>
-<p:sld xmlns:a="http://schemas.openxmlformats.org/drawingml/2006/main" xmlns:p="http://schemas.openxmlformats.org/presentationml/2006/main" xmlns:r="http://schemas.openxmlformats.org/officeDocument/2006/relationships">
+<p:sld xmlns:a="http://schemas.openxmlformats.org/drawingml/2006/main" xmlns:r="http://schemas.openxmlformats.org/officeDocument/2006/relationships" xmlns:p="http://schemas.openxmlformats.org/presentationml/2006/main">
   <p:cSld>
     <p:spTree>
       <p:nvGrpSpPr>
@@ -17430,7 +18181,14 @@
         <p:cNvGrpSpPr/>
         <p:nvPr/>
       </p:nvGrpSpPr>
-      <p:grpSpPr/>
+      <p:grpSpPr>
+        <a:xfrm>
+          <a:off x="0" y="0"/>
+          <a:ext cx="0" cy="0"/>
+          <a:chOff x="0" y="0"/>
+          <a:chExt cx="0" cy="0"/>
+        </a:xfrm>
+      </p:grpSpPr>
       <p:sp>
         <p:nvSpPr>
           <p:cNvPr id="2" name="Rectangle 1"/>
@@ -17470,7 +18228,9 @@
         <p:txBody>
           <a:bodyPr rtlCol="0" anchor="ctr"/>
           <a:lstStyle/>
-          <a:p/>
+          <a:p>
+            <a:endParaRPr/>
+          </a:p>
         </p:txBody>
       </p:sp>
       <p:sp>
@@ -17512,7 +18272,9 @@
         <p:txBody>
           <a:bodyPr rtlCol="0" anchor="ctr"/>
           <a:lstStyle/>
-          <a:p/>
+          <a:p>
+            <a:endParaRPr/>
+          </a:p>
         </p:txBody>
       </p:sp>
       <p:sp>
@@ -17609,7 +18371,9 @@
         <p:txBody>
           <a:bodyPr rtlCol="0" anchor="ctr"/>
           <a:lstStyle/>
-          <a:p/>
+          <a:p>
+            <a:endParaRPr/>
+          </a:p>
         </p:txBody>
       </p:sp>
       <p:sp>
@@ -17709,16 +18473,46 @@
                 <a:tableStyleId>{5C22544A-7EE6-4342-B048-85BDC9FD1C3A}</a:tableStyleId>
               </a:tblPr>
               <a:tblGrid>
-                <a:gridCol w="3339388"/>
-                <a:gridCol w="1062532"/>
-                <a:gridCol w="1062532"/>
-                <a:gridCol w="1062532"/>
-                <a:gridCol w="1062532"/>
+                <a:gridCol w="3339388">
+                  <a:extLst>
+                    <a:ext uri="{9D8B030D-6E8A-4147-A177-3AD203B41FA5}">
+                      <a16:colId xmlns:a16="http://schemas.microsoft.com/office/drawing/2014/main" val="20000"/>
+                    </a:ext>
+                  </a:extLst>
+                </a:gridCol>
+                <a:gridCol w="1062532">
+                  <a:extLst>
+                    <a:ext uri="{9D8B030D-6E8A-4147-A177-3AD203B41FA5}">
+                      <a16:colId xmlns:a16="http://schemas.microsoft.com/office/drawing/2014/main" val="20001"/>
+                    </a:ext>
+                  </a:extLst>
+                </a:gridCol>
+                <a:gridCol w="1062532">
+                  <a:extLst>
+                    <a:ext uri="{9D8B030D-6E8A-4147-A177-3AD203B41FA5}">
+                      <a16:colId xmlns:a16="http://schemas.microsoft.com/office/drawing/2014/main" val="20002"/>
+                    </a:ext>
+                  </a:extLst>
+                </a:gridCol>
+                <a:gridCol w="1062532">
+                  <a:extLst>
+                    <a:ext uri="{9D8B030D-6E8A-4147-A177-3AD203B41FA5}">
+                      <a16:colId xmlns:a16="http://schemas.microsoft.com/office/drawing/2014/main" val="20003"/>
+                    </a:ext>
+                  </a:extLst>
+                </a:gridCol>
+                <a:gridCol w="1062532">
+                  <a:extLst>
+                    <a:ext uri="{9D8B030D-6E8A-4147-A177-3AD203B41FA5}">
+                      <a16:colId xmlns:a16="http://schemas.microsoft.com/office/drawing/2014/main" val="20004"/>
+                    </a:ext>
+                  </a:extLst>
+                </a:gridCol>
               </a:tblGrid>
               <a:tr h="384048">
                 <a:tc>
                   <a:txBody>
-                    <a:bodyPr wrap="square"/>
+                    <a:bodyPr/>
                     <a:lstStyle/>
                     <a:p>
                       <a:pPr algn="l">
@@ -17745,7 +18539,7 @@
                 </a:tc>
                 <a:tc>
                   <a:txBody>
-                    <a:bodyPr wrap="square"/>
+                    <a:bodyPr/>
                     <a:lstStyle/>
                     <a:p>
                       <a:pPr algn="r">
@@ -17772,7 +18566,7 @@
                 </a:tc>
                 <a:tc>
                   <a:txBody>
-                    <a:bodyPr wrap="square"/>
+                    <a:bodyPr/>
                     <a:lstStyle/>
                     <a:p>
                       <a:pPr algn="r">
@@ -17799,7 +18593,7 @@
                 </a:tc>
                 <a:tc>
                   <a:txBody>
-                    <a:bodyPr wrap="square"/>
+                    <a:bodyPr/>
                     <a:lstStyle/>
                     <a:p>
                       <a:pPr algn="r">
@@ -17826,7 +18620,7 @@
                 </a:tc>
                 <a:tc>
                   <a:txBody>
-                    <a:bodyPr wrap="square"/>
+                    <a:bodyPr/>
                     <a:lstStyle/>
                     <a:p>
                       <a:pPr algn="r">
@@ -17851,11 +18645,16 @@
                     </a:solidFill>
                   </a:tcPr>
                 </a:tc>
+                <a:extLst>
+                  <a:ext uri="{0D108BD9-81ED-4DB2-BD59-A6C34878D82A}">
+                    <a16:rowId xmlns:a16="http://schemas.microsoft.com/office/drawing/2014/main" val="10000"/>
+                  </a:ext>
+                </a:extLst>
               </a:tr>
               <a:tr h="384048">
                 <a:tc>
                   <a:txBody>
-                    <a:bodyPr wrap="square"/>
+                    <a:bodyPr/>
                     <a:lstStyle/>
                     <a:p>
                       <a:pPr algn="l">
@@ -17882,7 +18681,7 @@
                 </a:tc>
                 <a:tc>
                   <a:txBody>
-                    <a:bodyPr wrap="square"/>
+                    <a:bodyPr/>
                     <a:lstStyle/>
                     <a:p>
                       <a:pPr algn="r">
@@ -17909,7 +18708,7 @@
                 </a:tc>
                 <a:tc>
                   <a:txBody>
-                    <a:bodyPr wrap="square"/>
+                    <a:bodyPr/>
                     <a:lstStyle/>
                     <a:p>
                       <a:pPr algn="r">
@@ -17936,7 +18735,7 @@
                 </a:tc>
                 <a:tc>
                   <a:txBody>
-                    <a:bodyPr wrap="square"/>
+                    <a:bodyPr/>
                     <a:lstStyle/>
                     <a:p>
                       <a:pPr algn="r">
@@ -17963,7 +18762,7 @@
                 </a:tc>
                 <a:tc>
                   <a:txBody>
-                    <a:bodyPr wrap="square"/>
+                    <a:bodyPr/>
                     <a:lstStyle/>
                     <a:p>
                       <a:pPr algn="r">
@@ -17988,11 +18787,16 @@
                     </a:solidFill>
                   </a:tcPr>
                 </a:tc>
+                <a:extLst>
+                  <a:ext uri="{0D108BD9-81ED-4DB2-BD59-A6C34878D82A}">
+                    <a16:rowId xmlns:a16="http://schemas.microsoft.com/office/drawing/2014/main" val="10001"/>
+                  </a:ext>
+                </a:extLst>
               </a:tr>
               <a:tr h="384048">
                 <a:tc>
                   <a:txBody>
-                    <a:bodyPr wrap="square"/>
+                    <a:bodyPr/>
                     <a:lstStyle/>
                     <a:p>
                       <a:pPr algn="l">
@@ -18019,7 +18823,7 @@
                 </a:tc>
                 <a:tc>
                   <a:txBody>
-                    <a:bodyPr wrap="square"/>
+                    <a:bodyPr/>
                     <a:lstStyle/>
                     <a:p>
                       <a:pPr algn="r">
@@ -18046,7 +18850,7 @@
                 </a:tc>
                 <a:tc>
                   <a:txBody>
-                    <a:bodyPr wrap="square"/>
+                    <a:bodyPr/>
                     <a:lstStyle/>
                     <a:p>
                       <a:pPr algn="r">
@@ -18073,7 +18877,7 @@
                 </a:tc>
                 <a:tc>
                   <a:txBody>
-                    <a:bodyPr wrap="square"/>
+                    <a:bodyPr/>
                     <a:lstStyle/>
                     <a:p>
                       <a:pPr algn="r">
@@ -18100,7 +18904,7 @@
                 </a:tc>
                 <a:tc>
                   <a:txBody>
-                    <a:bodyPr wrap="square"/>
+                    <a:bodyPr/>
                     <a:lstStyle/>
                     <a:p>
                       <a:pPr algn="r">
@@ -18125,11 +18929,16 @@
                     </a:solidFill>
                   </a:tcPr>
                 </a:tc>
+                <a:extLst>
+                  <a:ext uri="{0D108BD9-81ED-4DB2-BD59-A6C34878D82A}">
+                    <a16:rowId xmlns:a16="http://schemas.microsoft.com/office/drawing/2014/main" val="10002"/>
+                  </a:ext>
+                </a:extLst>
               </a:tr>
               <a:tr h="384048">
                 <a:tc>
                   <a:txBody>
-                    <a:bodyPr wrap="square"/>
+                    <a:bodyPr/>
                     <a:lstStyle/>
                     <a:p>
                       <a:pPr algn="l">
@@ -18156,7 +18965,7 @@
                 </a:tc>
                 <a:tc>
                   <a:txBody>
-                    <a:bodyPr wrap="square"/>
+                    <a:bodyPr/>
                     <a:lstStyle/>
                     <a:p>
                       <a:pPr algn="r">
@@ -18183,7 +18992,7 @@
                 </a:tc>
                 <a:tc>
                   <a:txBody>
-                    <a:bodyPr wrap="square"/>
+                    <a:bodyPr/>
                     <a:lstStyle/>
                     <a:p>
                       <a:pPr algn="r">
@@ -18210,7 +19019,7 @@
                 </a:tc>
                 <a:tc>
                   <a:txBody>
-                    <a:bodyPr wrap="square"/>
+                    <a:bodyPr/>
                     <a:lstStyle/>
                     <a:p>
                       <a:pPr algn="r">
@@ -18237,7 +19046,7 @@
                 </a:tc>
                 <a:tc>
                   <a:txBody>
-                    <a:bodyPr wrap="square"/>
+                    <a:bodyPr/>
                     <a:lstStyle/>
                     <a:p>
                       <a:pPr algn="r">
@@ -18262,6 +19071,11 @@
                     </a:solidFill>
                   </a:tcPr>
                 </a:tc>
+                <a:extLst>
+                  <a:ext uri="{0D108BD9-81ED-4DB2-BD59-A6C34878D82A}">
+                    <a16:rowId xmlns:a16="http://schemas.microsoft.com/office/drawing/2014/main" val="10003"/>
+                  </a:ext>
+                </a:extLst>
               </a:tr>
             </a:tbl>
           </a:graphicData>
@@ -18310,7 +19124,9 @@
         <p:txBody>
           <a:bodyPr rtlCol="0" anchor="ctr"/>
           <a:lstStyle/>
-          <a:p/>
+          <a:p>
+            <a:endParaRPr/>
+          </a:p>
         </p:txBody>
       </p:sp>
       <p:sp>
@@ -18450,7 +19266,9 @@
         <p:txBody>
           <a:bodyPr rtlCol="0" anchor="ctr"/>
           <a:lstStyle/>
-          <a:p/>
+          <a:p>
+            <a:endParaRPr/>
+          </a:p>
         </p:txBody>
       </p:sp>
       <p:sp>
@@ -18531,7 +19349,9 @@
         <p:txBody>
           <a:bodyPr rtlCol="0" anchor="ctr"/>
           <a:lstStyle/>
-          <a:p/>
+          <a:p>
+            <a:endParaRPr/>
+          </a:p>
         </p:txBody>
       </p:sp>
       <p:sp>
@@ -18615,7 +19435,9 @@
         <p:txBody>
           <a:bodyPr rtlCol="0" anchor="ctr"/>
           <a:lstStyle/>
-          <a:p/>
+          <a:p>
+            <a:endParaRPr/>
+          </a:p>
         </p:txBody>
       </p:sp>
       <p:sp>
@@ -18699,7 +19521,9 @@
         <p:txBody>
           <a:bodyPr rtlCol="0" anchor="ctr"/>
           <a:lstStyle/>
-          <a:p/>
+          <a:p>
+            <a:endParaRPr/>
+          </a:p>
         </p:txBody>
       </p:sp>
       <p:sp>
